--- a/presentation.pptx
+++ b/presentation.pptx
@@ -9,9 +9,15 @@
     <p:sldId id="258" r:id="rId3"/>
     <p:sldId id="263" r:id="rId4"/>
     <p:sldId id="261" r:id="rId5"/>
-    <p:sldId id="260" r:id="rId6"/>
-    <p:sldId id="262" r:id="rId7"/>
-    <p:sldId id="259" r:id="rId8"/>
+    <p:sldId id="267" r:id="rId6"/>
+    <p:sldId id="260" r:id="rId7"/>
+    <p:sldId id="262" r:id="rId8"/>
+    <p:sldId id="259" r:id="rId9"/>
+    <p:sldId id="264" r:id="rId10"/>
+    <p:sldId id="265" r:id="rId11"/>
+    <p:sldId id="266" r:id="rId12"/>
+    <p:sldId id="268" r:id="rId13"/>
+    <p:sldId id="270" r:id="rId14"/>
   </p:sldIdLst>
   <p:sldSz cx="12192000" cy="6858000"/>
   <p:notesSz cx="6858000" cy="9144000"/>
@@ -116,10 +122,10 @@
 <file path=ppt/revisionInfo.xml><?xml version="1.0" encoding="utf-8"?>
 <p1510:revInfo xmlns:a="http://schemas.openxmlformats.org/drawingml/2006/main" xmlns:r="http://schemas.openxmlformats.org/officeDocument/2006/relationships" xmlns:p1510="http://schemas.microsoft.com/office/powerpoint/2015/10/main">
   <p1510:revLst>
-    <p1510:client id="{4CF7F5C5-5D92-003F-7452-B2B7749D4642}" v="624" dt="2026-02-28T20:58:17.292"/>
-    <p1510:client id="{716F47B6-388F-B64A-3513-975C7EA96578}" v="324" dt="2026-02-28T20:29:56.071"/>
-    <p1510:client id="{FA9F7397-AC26-1A94-8469-3EB642366FE5}" v="179" dt="2026-02-28T20:30:54.096"/>
-    <p1510:client id="{FBCA8E88-E3FE-47C8-8EF5-290E61AC6385}" v="25" dt="2026-02-28T20:04:29.196"/>
+    <p1510:client id="{4CF7F5C5-5D92-003F-7452-B2B7749D4642}" v="1638" dt="2026-02-28T21:39:02.794"/>
+    <p1510:client id="{716F47B6-388F-B64A-3513-975C7EA96578}" v="990" dt="2026-02-28T21:38:00.840"/>
+    <p1510:client id="{FA9F7397-AC26-1A94-8469-3EB642366FE5}" v="542" dt="2026-02-28T21:38:40.044"/>
+    <p1510:client id="{FBCA8E88-E3FE-47C8-8EF5-290E61AC6385}" v="1415" dt="2026-02-28T21:49:31.179"/>
   </p1510:revLst>
 </p1510:revInfo>
 </file>
@@ -128,8 +134,8 @@
 <pc:chgInfo xmlns:a="http://schemas.openxmlformats.org/drawingml/2006/main" xmlns:r="http://schemas.openxmlformats.org/officeDocument/2006/relationships" xmlns:ac="http://schemas.microsoft.com/office/drawing/2013/main/command" xmlns:pc="http://schemas.microsoft.com/office/powerpoint/2013/main/command">
   <pc:docChgLst>
     <pc:chgData name="Kumar, Pronob" userId="d02b49e2-ad8b-46c0-979e-129feda16720" providerId="ADAL" clId="{B41445B4-506B-42E6-847C-AFF3E665062E}"/>
-    <pc:docChg chg="addSld delSld modSld sldOrd">
-      <pc:chgData name="Kumar, Pronob" userId="d02b49e2-ad8b-46c0-979e-129feda16720" providerId="ADAL" clId="{B41445B4-506B-42E6-847C-AFF3E665062E}" dt="2026-02-28T20:04:29.196" v="30" actId="20577"/>
+    <pc:docChg chg="undo custSel addSld delSld modSld sldOrd">
+      <pc:chgData name="Kumar, Pronob" userId="d02b49e2-ad8b-46c0-979e-129feda16720" providerId="ADAL" clId="{B41445B4-506B-42E6-847C-AFF3E665062E}" dt="2026-02-28T21:49:31.179" v="1420" actId="20577"/>
       <pc:docMkLst>
         <pc:docMk/>
       </pc:docMkLst>
@@ -141,11 +147,19 @@
         </pc:sldMkLst>
       </pc:sldChg>
       <pc:sldChg chg="addSp delSp modSp new mod">
-        <pc:chgData name="Kumar, Pronob" userId="d02b49e2-ad8b-46c0-979e-129feda16720" providerId="ADAL" clId="{B41445B4-506B-42E6-847C-AFF3E665062E}" dt="2026-02-28T20:04:01.373" v="6"/>
+        <pc:chgData name="Kumar, Pronob" userId="d02b49e2-ad8b-46c0-979e-129feda16720" providerId="ADAL" clId="{B41445B4-506B-42E6-847C-AFF3E665062E}" dt="2026-02-28T21:49:31.179" v="1420" actId="20577"/>
         <pc:sldMkLst>
           <pc:docMk/>
           <pc:sldMk cId="2287566913" sldId="257"/>
         </pc:sldMkLst>
+        <pc:spChg chg="mod">
+          <ac:chgData name="Kumar, Pronob" userId="d02b49e2-ad8b-46c0-979e-129feda16720" providerId="ADAL" clId="{B41445B4-506B-42E6-847C-AFF3E665062E}" dt="2026-02-28T21:49:31.179" v="1420" actId="20577"/>
+          <ac:spMkLst>
+            <pc:docMk/>
+            <pc:sldMk cId="2287566913" sldId="257"/>
+            <ac:spMk id="2" creationId="{46F82388-511D-B6FA-A49F-D5DABD44F454}"/>
+          </ac:spMkLst>
+        </pc:spChg>
         <pc:spChg chg="add del mod">
           <ac:chgData name="Kumar, Pronob" userId="d02b49e2-ad8b-46c0-979e-129feda16720" providerId="ADAL" clId="{B41445B4-506B-42E6-847C-AFF3E665062E}" dt="2026-02-28T20:04:01.373" v="6"/>
           <ac:spMkLst>
@@ -154,21 +168,60 @@
             <ac:spMk id="2" creationId="{B98CF39B-A407-A625-8479-39FC33EB33BA}"/>
           </ac:spMkLst>
         </pc:spChg>
+        <pc:spChg chg="mod">
+          <ac:chgData name="Kumar, Pronob" userId="d02b49e2-ad8b-46c0-979e-129feda16720" providerId="ADAL" clId="{B41445B4-506B-42E6-847C-AFF3E665062E}" dt="2026-02-28T21:49:01.919" v="1407" actId="27636"/>
+          <ac:spMkLst>
+            <pc:docMk/>
+            <pc:sldMk cId="2287566913" sldId="257"/>
+            <ac:spMk id="5" creationId="{8832276C-189E-74B4-9947-6E99D77EC2C0}"/>
+          </ac:spMkLst>
+        </pc:spChg>
       </pc:sldChg>
-      <pc:sldChg chg="addSp modSp new mod ord">
-        <pc:chgData name="Kumar, Pronob" userId="d02b49e2-ad8b-46c0-979e-129feda16720" providerId="ADAL" clId="{B41445B4-506B-42E6-847C-AFF3E665062E}" dt="2026-02-28T20:04:19.287" v="22"/>
+      <pc:sldChg chg="modSp mod">
+        <pc:chgData name="Kumar, Pronob" userId="d02b49e2-ad8b-46c0-979e-129feda16720" providerId="ADAL" clId="{B41445B4-506B-42E6-847C-AFF3E665062E}" dt="2026-02-28T21:27:39.277" v="994" actId="20577"/>
+        <pc:sldMkLst>
+          <pc:docMk/>
+          <pc:sldMk cId="1461446620" sldId="258"/>
+        </pc:sldMkLst>
+        <pc:spChg chg="mod">
+          <ac:chgData name="Kumar, Pronob" userId="d02b49e2-ad8b-46c0-979e-129feda16720" providerId="ADAL" clId="{B41445B4-506B-42E6-847C-AFF3E665062E}" dt="2026-02-28T21:27:39.277" v="994" actId="20577"/>
+          <ac:spMkLst>
+            <pc:docMk/>
+            <pc:sldMk cId="1461446620" sldId="258"/>
+            <ac:spMk id="6" creationId="{F071803E-D6A0-24C3-DB34-1D9D1D52BD35}"/>
+          </ac:spMkLst>
+        </pc:spChg>
+      </pc:sldChg>
+      <pc:sldChg chg="addSp delSp modSp new mod ord">
+        <pc:chgData name="Kumar, Pronob" userId="d02b49e2-ad8b-46c0-979e-129feda16720" providerId="ADAL" clId="{B41445B4-506B-42E6-847C-AFF3E665062E}" dt="2026-02-28T21:38:16.212" v="1209" actId="14100"/>
         <pc:sldMkLst>
           <pc:docMk/>
           <pc:sldMk cId="2557246359" sldId="259"/>
         </pc:sldMkLst>
         <pc:spChg chg="add mod">
-          <ac:chgData name="Kumar, Pronob" userId="d02b49e2-ad8b-46c0-979e-129feda16720" providerId="ADAL" clId="{B41445B4-506B-42E6-847C-AFF3E665062E}" dt="2026-02-28T20:04:12.985" v="19" actId="20577"/>
+          <ac:chgData name="Kumar, Pronob" userId="d02b49e2-ad8b-46c0-979e-129feda16720" providerId="ADAL" clId="{B41445B4-506B-42E6-847C-AFF3E665062E}" dt="2026-02-28T21:38:06.430" v="1204" actId="14100"/>
           <ac:spMkLst>
             <pc:docMk/>
             <pc:sldMk cId="2557246359" sldId="259"/>
             <ac:spMk id="2" creationId="{34B13AE6-6445-05CA-312E-2376A93A06DE}"/>
           </ac:spMkLst>
         </pc:spChg>
+        <pc:spChg chg="add mod">
+          <ac:chgData name="Kumar, Pronob" userId="d02b49e2-ad8b-46c0-979e-129feda16720" providerId="ADAL" clId="{B41445B4-506B-42E6-847C-AFF3E665062E}" dt="2026-02-28T21:38:16.212" v="1209" actId="14100"/>
+          <ac:spMkLst>
+            <pc:docMk/>
+            <pc:sldMk cId="2557246359" sldId="259"/>
+            <ac:spMk id="5" creationId="{856EF08C-A5CF-5E5E-936D-B47B450A6718}"/>
+          </ac:spMkLst>
+        </pc:spChg>
+        <pc:picChg chg="add del mod">
+          <ac:chgData name="Kumar, Pronob" userId="d02b49e2-ad8b-46c0-979e-129feda16720" providerId="ADAL" clId="{B41445B4-506B-42E6-847C-AFF3E665062E}" dt="2026-02-28T21:13:12.855" v="150" actId="21"/>
+          <ac:picMkLst>
+            <pc:docMk/>
+            <pc:sldMk cId="2557246359" sldId="259"/>
+            <ac:picMk id="4" creationId="{92B161D5-02F8-4F41-3765-A07001B33B15}"/>
+          </ac:picMkLst>
+        </pc:picChg>
       </pc:sldChg>
       <pc:sldChg chg="addSp modSp new mod">
         <pc:chgData name="Kumar, Pronob" userId="d02b49e2-ad8b-46c0-979e-129feda16720" providerId="ADAL" clId="{B41445B4-506B-42E6-847C-AFF3E665062E}" dt="2026-02-28T20:04:29.196" v="30" actId="20577"/>
@@ -185,21 +238,230 @@
           </ac:spMkLst>
         </pc:spChg>
       </pc:sldChg>
+      <pc:sldChg chg="addSp modSp mod">
+        <pc:chgData name="Kumar, Pronob" userId="d02b49e2-ad8b-46c0-979e-129feda16720" providerId="ADAL" clId="{B41445B4-506B-42E6-847C-AFF3E665062E}" dt="2026-02-28T21:30:12.896" v="1099" actId="20577"/>
+        <pc:sldMkLst>
+          <pc:docMk/>
+          <pc:sldMk cId="4256159325" sldId="264"/>
+        </pc:sldMkLst>
+        <pc:spChg chg="mod">
+          <ac:chgData name="Kumar, Pronob" userId="d02b49e2-ad8b-46c0-979e-129feda16720" providerId="ADAL" clId="{B41445B4-506B-42E6-847C-AFF3E665062E}" dt="2026-02-28T21:28:04.477" v="997" actId="1076"/>
+          <ac:spMkLst>
+            <pc:docMk/>
+            <pc:sldMk cId="4256159325" sldId="264"/>
+            <ac:spMk id="3" creationId="{9A507855-AED7-298A-9634-C2ED25EAF518}"/>
+          </ac:spMkLst>
+        </pc:spChg>
+        <pc:spChg chg="add mod">
+          <ac:chgData name="Kumar, Pronob" userId="d02b49e2-ad8b-46c0-979e-129feda16720" providerId="ADAL" clId="{B41445B4-506B-42E6-847C-AFF3E665062E}" dt="2026-02-28T21:30:12.896" v="1099" actId="20577"/>
+          <ac:spMkLst>
+            <pc:docMk/>
+            <pc:sldMk cId="4256159325" sldId="264"/>
+            <ac:spMk id="7" creationId="{636CC0DC-95D8-6257-2896-8987AFCB7A0B}"/>
+          </ac:spMkLst>
+        </pc:spChg>
+        <pc:picChg chg="add mod">
+          <ac:chgData name="Kumar, Pronob" userId="d02b49e2-ad8b-46c0-979e-129feda16720" providerId="ADAL" clId="{B41445B4-506B-42E6-847C-AFF3E665062E}" dt="2026-02-28T21:28:26.037" v="1002" actId="14100"/>
+          <ac:picMkLst>
+            <pc:docMk/>
+            <pc:sldMk cId="4256159325" sldId="264"/>
+            <ac:picMk id="4" creationId="{B2D127C8-1047-DC51-7825-A222429E1846}"/>
+          </ac:picMkLst>
+        </pc:picChg>
+        <pc:picChg chg="add mod">
+          <ac:chgData name="Kumar, Pronob" userId="d02b49e2-ad8b-46c0-979e-129feda16720" providerId="ADAL" clId="{B41445B4-506B-42E6-847C-AFF3E665062E}" dt="2026-02-28T21:28:34.143" v="1003" actId="14100"/>
+          <ac:picMkLst>
+            <pc:docMk/>
+            <pc:sldMk cId="4256159325" sldId="264"/>
+            <ac:picMk id="6" creationId="{D95D4B59-221A-8045-36E2-A33CA2B55E65}"/>
+          </ac:picMkLst>
+        </pc:picChg>
+      </pc:sldChg>
+      <pc:sldChg chg="addSp modSp mod">
+        <pc:chgData name="Kumar, Pronob" userId="d02b49e2-ad8b-46c0-979e-129feda16720" providerId="ADAL" clId="{B41445B4-506B-42E6-847C-AFF3E665062E}" dt="2026-02-28T21:27:24.798" v="985" actId="1076"/>
+        <pc:sldMkLst>
+          <pc:docMk/>
+          <pc:sldMk cId="3738759402" sldId="265"/>
+        </pc:sldMkLst>
+        <pc:spChg chg="mod">
+          <ac:chgData name="Kumar, Pronob" userId="d02b49e2-ad8b-46c0-979e-129feda16720" providerId="ADAL" clId="{B41445B4-506B-42E6-847C-AFF3E665062E}" dt="2026-02-28T21:25:39.776" v="868" actId="1076"/>
+          <ac:spMkLst>
+            <pc:docMk/>
+            <pc:sldMk cId="3738759402" sldId="265"/>
+            <ac:spMk id="3" creationId="{4B5922F2-ACFA-BCF1-5823-1817A87A997E}"/>
+          </ac:spMkLst>
+        </pc:spChg>
+        <pc:spChg chg="add mod">
+          <ac:chgData name="Kumar, Pronob" userId="d02b49e2-ad8b-46c0-979e-129feda16720" providerId="ADAL" clId="{B41445B4-506B-42E6-847C-AFF3E665062E}" dt="2026-02-28T21:27:24.798" v="985" actId="1076"/>
+          <ac:spMkLst>
+            <pc:docMk/>
+            <pc:sldMk cId="3738759402" sldId="265"/>
+            <ac:spMk id="5" creationId="{3BD2FD1A-4DC7-C4CD-4AD5-91D1D2CE691B}"/>
+          </ac:spMkLst>
+        </pc:spChg>
+        <pc:picChg chg="add mod">
+          <ac:chgData name="Kumar, Pronob" userId="d02b49e2-ad8b-46c0-979e-129feda16720" providerId="ADAL" clId="{B41445B4-506B-42E6-847C-AFF3E665062E}" dt="2026-02-28T21:25:44.648" v="869" actId="1076"/>
+          <ac:picMkLst>
+            <pc:docMk/>
+            <pc:sldMk cId="3738759402" sldId="265"/>
+            <ac:picMk id="4" creationId="{1B99EF25-685E-8AA2-586E-2B1C9D5F5803}"/>
+          </ac:picMkLst>
+        </pc:picChg>
+      </pc:sldChg>
+      <pc:sldChg chg="addSp delSp modSp mod">
+        <pc:chgData name="Kumar, Pronob" userId="d02b49e2-ad8b-46c0-979e-129feda16720" providerId="ADAL" clId="{B41445B4-506B-42E6-847C-AFF3E665062E}" dt="2026-02-28T21:37:37.133" v="1196" actId="403"/>
+        <pc:sldMkLst>
+          <pc:docMk/>
+          <pc:sldMk cId="1561312112" sldId="266"/>
+        </pc:sldMkLst>
+        <pc:spChg chg="mod">
+          <ac:chgData name="Kumar, Pronob" userId="d02b49e2-ad8b-46c0-979e-129feda16720" providerId="ADAL" clId="{B41445B4-506B-42E6-847C-AFF3E665062E}" dt="2026-02-28T21:31:28.763" v="1155" actId="255"/>
+          <ac:spMkLst>
+            <pc:docMk/>
+            <pc:sldMk cId="1561312112" sldId="266"/>
+            <ac:spMk id="3" creationId="{CE16AF6D-396B-01FA-E3F5-3FC66F1A09D9}"/>
+          </ac:spMkLst>
+        </pc:spChg>
+        <pc:spChg chg="add mod">
+          <ac:chgData name="Kumar, Pronob" userId="d02b49e2-ad8b-46c0-979e-129feda16720" providerId="ADAL" clId="{B41445B4-506B-42E6-847C-AFF3E665062E}" dt="2026-02-28T21:37:37.133" v="1196" actId="403"/>
+          <ac:spMkLst>
+            <pc:docMk/>
+            <pc:sldMk cId="1561312112" sldId="266"/>
+            <ac:spMk id="11" creationId="{F72C558E-5FC3-BD5C-A25E-84E3F0E91338}"/>
+          </ac:spMkLst>
+        </pc:spChg>
+        <pc:picChg chg="add del">
+          <ac:chgData name="Kumar, Pronob" userId="d02b49e2-ad8b-46c0-979e-129feda16720" providerId="ADAL" clId="{B41445B4-506B-42E6-847C-AFF3E665062E}" dt="2026-02-28T21:32:08.190" v="1157" actId="22"/>
+          <ac:picMkLst>
+            <pc:docMk/>
+            <pc:sldMk cId="1561312112" sldId="266"/>
+            <ac:picMk id="4" creationId="{43249E44-A9A0-04B5-B678-7C4A17D910C1}"/>
+          </ac:picMkLst>
+        </pc:picChg>
+        <pc:picChg chg="add del">
+          <ac:chgData name="Kumar, Pronob" userId="d02b49e2-ad8b-46c0-979e-129feda16720" providerId="ADAL" clId="{B41445B4-506B-42E6-847C-AFF3E665062E}" dt="2026-02-28T21:33:04.667" v="1159" actId="478"/>
+          <ac:picMkLst>
+            <pc:docMk/>
+            <pc:sldMk cId="1561312112" sldId="266"/>
+            <ac:picMk id="6" creationId="{7B2FED92-931D-7AFF-E9AC-D9A932E0FCF0}"/>
+          </ac:picMkLst>
+        </pc:picChg>
+        <pc:picChg chg="add del mod">
+          <ac:chgData name="Kumar, Pronob" userId="d02b49e2-ad8b-46c0-979e-129feda16720" providerId="ADAL" clId="{B41445B4-506B-42E6-847C-AFF3E665062E}" dt="2026-02-28T21:35:53.524" v="1162" actId="478"/>
+          <ac:picMkLst>
+            <pc:docMk/>
+            <pc:sldMk cId="1561312112" sldId="266"/>
+            <ac:picMk id="8" creationId="{1D5B54E8-077D-1D42-22A8-469FD83F97E9}"/>
+          </ac:picMkLst>
+        </pc:picChg>
+        <pc:picChg chg="add mod">
+          <ac:chgData name="Kumar, Pronob" userId="d02b49e2-ad8b-46c0-979e-129feda16720" providerId="ADAL" clId="{B41445B4-506B-42E6-847C-AFF3E665062E}" dt="2026-02-28T21:36:02.850" v="1166" actId="1076"/>
+          <ac:picMkLst>
+            <pc:docMk/>
+            <pc:sldMk cId="1561312112" sldId="266"/>
+            <ac:picMk id="10" creationId="{E30BCDFB-8374-4D0A-6FB7-D4CF24FCB854}"/>
+          </ac:picMkLst>
+        </pc:picChg>
+      </pc:sldChg>
+      <pc:sldChg chg="addSp delSp modSp add del mod">
+        <pc:chgData name="Kumar, Pronob" userId="d02b49e2-ad8b-46c0-979e-129feda16720" providerId="ADAL" clId="{B41445B4-506B-42E6-847C-AFF3E665062E}" dt="2026-02-28T21:40:04.673" v="1304" actId="47"/>
+        <pc:sldMkLst>
+          <pc:docMk/>
+          <pc:sldMk cId="1615472381" sldId="268"/>
+        </pc:sldMkLst>
+        <pc:spChg chg="mod">
+          <ac:chgData name="Kumar, Pronob" userId="d02b49e2-ad8b-46c0-979e-129feda16720" providerId="ADAL" clId="{B41445B4-506B-42E6-847C-AFF3E665062E}" dt="2026-02-28T21:39:55.545" v="1301" actId="403"/>
+          <ac:spMkLst>
+            <pc:docMk/>
+            <pc:sldMk cId="1615472381" sldId="268"/>
+            <ac:spMk id="2" creationId="{DB77DF34-B729-6151-6209-6FC8E030416D}"/>
+          </ac:spMkLst>
+        </pc:spChg>
+        <pc:spChg chg="del mod">
+          <ac:chgData name="Kumar, Pronob" userId="d02b49e2-ad8b-46c0-979e-129feda16720" providerId="ADAL" clId="{B41445B4-506B-42E6-847C-AFF3E665062E}" dt="2026-02-28T21:38:54.582" v="1282"/>
+          <ac:spMkLst>
+            <pc:docMk/>
+            <pc:sldMk cId="1615472381" sldId="268"/>
+            <ac:spMk id="5" creationId="{3D44C95D-670E-76D6-894F-24E9EB07C493}"/>
+          </ac:spMkLst>
+        </pc:spChg>
+        <pc:picChg chg="add mod">
+          <ac:chgData name="Kumar, Pronob" userId="d02b49e2-ad8b-46c0-979e-129feda16720" providerId="ADAL" clId="{B41445B4-506B-42E6-847C-AFF3E665062E}" dt="2026-02-28T21:40:00.012" v="1302" actId="1076"/>
+          <ac:picMkLst>
+            <pc:docMk/>
+            <pc:sldMk cId="1615472381" sldId="268"/>
+            <ac:picMk id="4" creationId="{6DA6647C-C68B-5001-A8A1-7C36A5B84196}"/>
+          </ac:picMkLst>
+        </pc:picChg>
+      </pc:sldChg>
+      <pc:sldChg chg="del">
+        <pc:chgData name="Kumar, Pronob" userId="d02b49e2-ad8b-46c0-979e-129feda16720" providerId="ADAL" clId="{B41445B4-506B-42E6-847C-AFF3E665062E}" dt="2026-02-28T21:40:06.957" v="1305" actId="47"/>
+        <pc:sldMkLst>
+          <pc:docMk/>
+          <pc:sldMk cId="2119702881" sldId="269"/>
+        </pc:sldMkLst>
+      </pc:sldChg>
+      <pc:sldChg chg="addSp modSp mod">
+        <pc:chgData name="Kumar, Pronob" userId="d02b49e2-ad8b-46c0-979e-129feda16720" providerId="ADAL" clId="{B41445B4-506B-42E6-847C-AFF3E665062E}" dt="2026-02-28T21:46:58.333" v="1404" actId="20577"/>
+        <pc:sldMkLst>
+          <pc:docMk/>
+          <pc:sldMk cId="2635568907" sldId="270"/>
+        </pc:sldMkLst>
+        <pc:spChg chg="add mod">
+          <ac:chgData name="Kumar, Pronob" userId="d02b49e2-ad8b-46c0-979e-129feda16720" providerId="ADAL" clId="{B41445B4-506B-42E6-847C-AFF3E665062E}" dt="2026-02-28T21:46:58.333" v="1404" actId="20577"/>
+          <ac:spMkLst>
+            <pc:docMk/>
+            <pc:sldMk cId="2635568907" sldId="270"/>
+            <ac:spMk id="4" creationId="{2B35870D-C1FD-2537-5F23-9A7B45D1130F}"/>
+          </ac:spMkLst>
+        </pc:spChg>
+      </pc:sldChg>
     </pc:docChg>
   </pc:docChgLst>
   <pc:docChgLst>
     <pc:chgData name="Weber, Walter E" userId="S::ke9712wb@go.minnstate.edu::04fb7385-cd6c-43f1-bcbc-0e8fd80cc4d2" providerId="AD" clId="Web-{4CF7F5C5-5D92-003F-7452-B2B7749D4642}"/>
-    <pc:docChg chg="addSld modSld">
-      <pc:chgData name="Weber, Walter E" userId="S::ke9712wb@go.minnstate.edu::04fb7385-cd6c-43f1-bcbc-0e8fd80cc4d2" providerId="AD" clId="Web-{4CF7F5C5-5D92-003F-7452-B2B7749D4642}" dt="2026-02-28T20:58:17.292" v="348" actId="1076"/>
+    <pc:docChg chg="addSld delSld modSld">
+      <pc:chgData name="Weber, Walter E" userId="S::ke9712wb@go.minnstate.edu::04fb7385-cd6c-43f1-bcbc-0e8fd80cc4d2" providerId="AD" clId="Web-{4CF7F5C5-5D92-003F-7452-B2B7749D4642}" dt="2026-02-28T21:39:01.685" v="907" actId="20577"/>
       <pc:docMkLst>
         <pc:docMk/>
       </pc:docMkLst>
+      <pc:sldChg chg="addSp modSp">
+        <pc:chgData name="Weber, Walter E" userId="S::ke9712wb@go.minnstate.edu::04fb7385-cd6c-43f1-bcbc-0e8fd80cc4d2" providerId="AD" clId="Web-{4CF7F5C5-5D92-003F-7452-B2B7749D4642}" dt="2026-02-28T21:25:37.911" v="754" actId="20577"/>
+        <pc:sldMkLst>
+          <pc:docMk/>
+          <pc:sldMk cId="2287566913" sldId="257"/>
+        </pc:sldMkLst>
+        <pc:spChg chg="add mod">
+          <ac:chgData name="Weber, Walter E" userId="S::ke9712wb@go.minnstate.edu::04fb7385-cd6c-43f1-bcbc-0e8fd80cc4d2" providerId="AD" clId="Web-{4CF7F5C5-5D92-003F-7452-B2B7749D4642}" dt="2026-02-28T21:25:08.723" v="748" actId="14100"/>
+          <ac:spMkLst>
+            <pc:docMk/>
+            <pc:sldMk cId="2287566913" sldId="257"/>
+            <ac:spMk id="2" creationId="{46F82388-511D-B6FA-A49F-D5DABD44F454}"/>
+          </ac:spMkLst>
+        </pc:spChg>
+        <pc:spChg chg="mod">
+          <ac:chgData name="Weber, Walter E" userId="S::ke9712wb@go.minnstate.edu::04fb7385-cd6c-43f1-bcbc-0e8fd80cc4d2" providerId="AD" clId="Web-{4CF7F5C5-5D92-003F-7452-B2B7749D4642}" dt="2026-02-28T21:25:37.911" v="754" actId="20577"/>
+          <ac:spMkLst>
+            <pc:docMk/>
+            <pc:sldMk cId="2287566913" sldId="257"/>
+            <ac:spMk id="5" creationId="{8832276C-189E-74B4-9947-6E99D77EC2C0}"/>
+          </ac:spMkLst>
+        </pc:spChg>
+      </pc:sldChg>
       <pc:sldChg chg="addSp delSp modSp new">
-        <pc:chgData name="Weber, Walter E" userId="S::ke9712wb@go.minnstate.edu::04fb7385-cd6c-43f1-bcbc-0e8fd80cc4d2" providerId="AD" clId="Web-{4CF7F5C5-5D92-003F-7452-B2B7749D4642}" dt="2026-02-28T20:56:07.356" v="294" actId="1076"/>
+        <pc:chgData name="Weber, Walter E" userId="S::ke9712wb@go.minnstate.edu::04fb7385-cd6c-43f1-bcbc-0e8fd80cc4d2" providerId="AD" clId="Web-{4CF7F5C5-5D92-003F-7452-B2B7749D4642}" dt="2026-02-28T21:35:38.357" v="863" actId="20577"/>
         <pc:sldMkLst>
           <pc:docMk/>
           <pc:sldMk cId="1461446620" sldId="258"/>
         </pc:sldMkLst>
+        <pc:spChg chg="add mod">
+          <ac:chgData name="Weber, Walter E" userId="S::ke9712wb@go.minnstate.edu::04fb7385-cd6c-43f1-bcbc-0e8fd80cc4d2" providerId="AD" clId="Web-{4CF7F5C5-5D92-003F-7452-B2B7749D4642}" dt="2026-02-28T21:35:38.357" v="863" actId="20577"/>
+          <ac:spMkLst>
+            <pc:docMk/>
+            <pc:sldMk cId="1461446620" sldId="258"/>
+            <ac:spMk id="2" creationId="{25CCF194-7100-E8E2-06B4-11C3E3EBC437}"/>
+          </ac:spMkLst>
+        </pc:spChg>
         <pc:spChg chg="add del">
           <ac:chgData name="Weber, Walter E" userId="S::ke9712wb@go.minnstate.edu::04fb7385-cd6c-43f1-bcbc-0e8fd80cc4d2" providerId="AD" clId="Web-{4CF7F5C5-5D92-003F-7452-B2B7749D4642}" dt="2026-02-28T20:10:56.278" v="24"/>
           <ac:spMkLst>
@@ -209,7 +471,7 @@
           </ac:spMkLst>
         </pc:spChg>
         <pc:spChg chg="add mod">
-          <ac:chgData name="Weber, Walter E" userId="S::ke9712wb@go.minnstate.edu::04fb7385-cd6c-43f1-bcbc-0e8fd80cc4d2" providerId="AD" clId="Web-{4CF7F5C5-5D92-003F-7452-B2B7749D4642}" dt="2026-02-28T20:11:51.282" v="89" actId="20577"/>
+          <ac:chgData name="Weber, Walter E" userId="S::ke9712wb@go.minnstate.edu::04fb7385-cd6c-43f1-bcbc-0e8fd80cc4d2" providerId="AD" clId="Web-{4CF7F5C5-5D92-003F-7452-B2B7749D4642}" dt="2026-02-28T21:26:04.911" v="758" actId="20577"/>
           <ac:spMkLst>
             <pc:docMk/>
             <pc:sldMk cId="1461446620" sldId="258"/>
@@ -217,7 +479,7 @@
           </ac:spMkLst>
         </pc:spChg>
         <pc:spChg chg="add mod">
-          <ac:chgData name="Weber, Walter E" userId="S::ke9712wb@go.minnstate.edu::04fb7385-cd6c-43f1-bcbc-0e8fd80cc4d2" providerId="AD" clId="Web-{4CF7F5C5-5D92-003F-7452-B2B7749D4642}" dt="2026-02-28T20:56:07.356" v="294" actId="1076"/>
+          <ac:chgData name="Weber, Walter E" userId="S::ke9712wb@go.minnstate.edu::04fb7385-cd6c-43f1-bcbc-0e8fd80cc4d2" providerId="AD" clId="Web-{4CF7F5C5-5D92-003F-7452-B2B7749D4642}" dt="2026-02-28T21:25:56.629" v="755" actId="20577"/>
           <ac:spMkLst>
             <pc:docMk/>
             <pc:sldMk cId="1461446620" sldId="258"/>
@@ -225,7 +487,7 @@
           </ac:spMkLst>
         </pc:spChg>
         <pc:spChg chg="add mod">
-          <ac:chgData name="Weber, Walter E" userId="S::ke9712wb@go.minnstate.edu::04fb7385-cd6c-43f1-bcbc-0e8fd80cc4d2" providerId="AD" clId="Web-{4CF7F5C5-5D92-003F-7452-B2B7749D4642}" dt="2026-02-28T20:33:54.186" v="203" actId="20577"/>
+          <ac:chgData name="Weber, Walter E" userId="S::ke9712wb@go.minnstate.edu::04fb7385-cd6c-43f1-bcbc-0e8fd80cc4d2" providerId="AD" clId="Web-{4CF7F5C5-5D92-003F-7452-B2B7749D4642}" dt="2026-02-28T21:26:01.067" v="757" actId="20577"/>
           <ac:spMkLst>
             <pc:docMk/>
             <pc:sldMk cId="1461446620" sldId="258"/>
@@ -257,14 +519,29 @@
           </ac:picMkLst>
         </pc:picChg>
       </pc:sldChg>
-      <pc:sldChg chg="addSp modSp new">
-        <pc:chgData name="Weber, Walter E" userId="S::ke9712wb@go.minnstate.edu::04fb7385-cd6c-43f1-bcbc-0e8fd80cc4d2" providerId="AD" clId="Web-{4CF7F5C5-5D92-003F-7452-B2B7749D4642}" dt="2026-02-28T20:58:17.292" v="348" actId="1076"/>
+      <pc:sldChg chg="modSp">
+        <pc:chgData name="Weber, Walter E" userId="S::ke9712wb@go.minnstate.edu::04fb7385-cd6c-43f1-bcbc-0e8fd80cc4d2" providerId="AD" clId="Web-{4CF7F5C5-5D92-003F-7452-B2B7749D4642}" dt="2026-02-28T21:36:09.685" v="864" actId="14100"/>
+        <pc:sldMkLst>
+          <pc:docMk/>
+          <pc:sldMk cId="2557246359" sldId="259"/>
+        </pc:sldMkLst>
+        <pc:spChg chg="mod">
+          <ac:chgData name="Weber, Walter E" userId="S::ke9712wb@go.minnstate.edu::04fb7385-cd6c-43f1-bcbc-0e8fd80cc4d2" providerId="AD" clId="Web-{4CF7F5C5-5D92-003F-7452-B2B7749D4642}" dt="2026-02-28T21:36:09.685" v="864" actId="14100"/>
+          <ac:spMkLst>
+            <pc:docMk/>
+            <pc:sldMk cId="2557246359" sldId="259"/>
+            <ac:spMk id="5" creationId="{856EF08C-A5CF-5E5E-936D-B47B450A6718}"/>
+          </ac:spMkLst>
+        </pc:spChg>
+      </pc:sldChg>
+      <pc:sldChg chg="addSp delSp modSp new">
+        <pc:chgData name="Weber, Walter E" userId="S::ke9712wb@go.minnstate.edu::04fb7385-cd6c-43f1-bcbc-0e8fd80cc4d2" providerId="AD" clId="Web-{4CF7F5C5-5D92-003F-7452-B2B7749D4642}" dt="2026-02-28T21:24:31.536" v="742" actId="20577"/>
         <pc:sldMkLst>
           <pc:docMk/>
           <pc:sldMk cId="3221513061" sldId="261"/>
         </pc:sldMkLst>
         <pc:spChg chg="add mod">
-          <ac:chgData name="Weber, Walter E" userId="S::ke9712wb@go.minnstate.edu::04fb7385-cd6c-43f1-bcbc-0e8fd80cc4d2" providerId="AD" clId="Web-{4CF7F5C5-5D92-003F-7452-B2B7749D4642}" dt="2026-02-28T20:57:40.823" v="323" actId="20577"/>
+          <ac:chgData name="Weber, Walter E" userId="S::ke9712wb@go.minnstate.edu::04fb7385-cd6c-43f1-bcbc-0e8fd80cc4d2" providerId="AD" clId="Web-{4CF7F5C5-5D92-003F-7452-B2B7749D4642}" dt="2026-02-28T21:24:31.536" v="742" actId="20577"/>
           <ac:spMkLst>
             <pc:docMk/>
             <pc:sldMk cId="3221513061" sldId="261"/>
@@ -272,11 +549,59 @@
           </ac:spMkLst>
         </pc:spChg>
         <pc:spChg chg="add mod">
-          <ac:chgData name="Weber, Walter E" userId="S::ke9712wb@go.minnstate.edu::04fb7385-cd6c-43f1-bcbc-0e8fd80cc4d2" providerId="AD" clId="Web-{4CF7F5C5-5D92-003F-7452-B2B7749D4642}" dt="2026-02-28T20:58:17.292" v="348" actId="1076"/>
+          <ac:chgData name="Weber, Walter E" userId="S::ke9712wb@go.minnstate.edu::04fb7385-cd6c-43f1-bcbc-0e8fd80cc4d2" providerId="AD" clId="Web-{4CF7F5C5-5D92-003F-7452-B2B7749D4642}" dt="2026-02-28T21:24:27.520" v="741" actId="20577"/>
           <ac:spMkLst>
             <pc:docMk/>
             <pc:sldMk cId="3221513061" sldId="261"/>
             <ac:spMk id="5" creationId="{6E3FD651-4AC8-2E24-0762-9D6B2F634199}"/>
+          </ac:spMkLst>
+        </pc:spChg>
+        <pc:spChg chg="add mod">
+          <ac:chgData name="Weber, Walter E" userId="S::ke9712wb@go.minnstate.edu::04fb7385-cd6c-43f1-bcbc-0e8fd80cc4d2" providerId="AD" clId="Web-{4CF7F5C5-5D92-003F-7452-B2B7749D4642}" dt="2026-02-28T21:24:23.036" v="740" actId="20577"/>
+          <ac:spMkLst>
+            <pc:docMk/>
+            <pc:sldMk cId="3221513061" sldId="261"/>
+            <ac:spMk id="6" creationId="{4B2BB9FB-ED8B-6604-9A28-735A8B422904}"/>
+          </ac:spMkLst>
+        </pc:spChg>
+        <pc:spChg chg="add mod">
+          <ac:chgData name="Weber, Walter E" userId="S::ke9712wb@go.minnstate.edu::04fb7385-cd6c-43f1-bcbc-0e8fd80cc4d2" providerId="AD" clId="Web-{4CF7F5C5-5D92-003F-7452-B2B7749D4642}" dt="2026-02-28T21:24:16.629" v="739" actId="20577"/>
+          <ac:spMkLst>
+            <pc:docMk/>
+            <pc:sldMk cId="3221513061" sldId="261"/>
+            <ac:spMk id="7" creationId="{B45A3BF0-7AF4-FA92-CF76-98BDB92EFE1B}"/>
+          </ac:spMkLst>
+        </pc:spChg>
+        <pc:spChg chg="add del">
+          <ac:chgData name="Weber, Walter E" userId="S::ke9712wb@go.minnstate.edu::04fb7385-cd6c-43f1-bcbc-0e8fd80cc4d2" providerId="AD" clId="Web-{4CF7F5C5-5D92-003F-7452-B2B7749D4642}" dt="2026-02-28T21:05:50.308" v="652"/>
+          <ac:spMkLst>
+            <pc:docMk/>
+            <pc:sldMk cId="3221513061" sldId="261"/>
+            <ac:spMk id="8" creationId="{6C0DE608-A3B2-2390-97E5-B5237CDF0772}"/>
+          </ac:spMkLst>
+        </pc:spChg>
+        <pc:spChg chg="add mod">
+          <ac:chgData name="Weber, Walter E" userId="S::ke9712wb@go.minnstate.edu::04fb7385-cd6c-43f1-bcbc-0e8fd80cc4d2" providerId="AD" clId="Web-{4CF7F5C5-5D92-003F-7452-B2B7749D4642}" dt="2026-02-28T21:06:23.667" v="654" actId="14100"/>
+          <ac:spMkLst>
+            <pc:docMk/>
+            <pc:sldMk cId="3221513061" sldId="261"/>
+            <ac:spMk id="9" creationId="{7386DD9A-A96D-78B0-FED2-9DC59084BD42}"/>
+          </ac:spMkLst>
+        </pc:spChg>
+        <pc:spChg chg="add mod">
+          <ac:chgData name="Weber, Walter E" userId="S::ke9712wb@go.minnstate.edu::04fb7385-cd6c-43f1-bcbc-0e8fd80cc4d2" providerId="AD" clId="Web-{4CF7F5C5-5D92-003F-7452-B2B7749D4642}" dt="2026-02-28T21:06:45.995" v="659" actId="14100"/>
+          <ac:spMkLst>
+            <pc:docMk/>
+            <pc:sldMk cId="3221513061" sldId="261"/>
+            <ac:spMk id="10" creationId="{FD6F3FCD-0AE7-6053-35F9-55D9B9F50353}"/>
+          </ac:spMkLst>
+        </pc:spChg>
+        <pc:spChg chg="add del mod">
+          <ac:chgData name="Weber, Walter E" userId="S::ke9712wb@go.minnstate.edu::04fb7385-cd6c-43f1-bcbc-0e8fd80cc4d2" providerId="AD" clId="Web-{4CF7F5C5-5D92-003F-7452-B2B7749D4642}" dt="2026-02-28T21:07:20.260" v="671"/>
+          <ac:spMkLst>
+            <pc:docMk/>
+            <pc:sldMk cId="3221513061" sldId="261"/>
+            <ac:spMk id="11" creationId="{9F208F54-944B-B3FA-137D-DE65FA1968D6}"/>
           </ac:spMkLst>
         </pc:spChg>
         <pc:picChg chg="add mod">
@@ -297,13 +622,13 @@
         </pc:picChg>
       </pc:sldChg>
       <pc:sldChg chg="addSp modSp new">
-        <pc:chgData name="Weber, Walter E" userId="S::ke9712wb@go.minnstate.edu::04fb7385-cd6c-43f1-bcbc-0e8fd80cc4d2" providerId="AD" clId="Web-{4CF7F5C5-5D92-003F-7452-B2B7749D4642}" dt="2026-02-28T20:56:32.402" v="300" actId="1076"/>
+        <pc:chgData name="Weber, Walter E" userId="S::ke9712wb@go.minnstate.edu::04fb7385-cd6c-43f1-bcbc-0e8fd80cc4d2" providerId="AD" clId="Web-{4CF7F5C5-5D92-003F-7452-B2B7749D4642}" dt="2026-02-28T21:24:55.176" v="745" actId="20577"/>
         <pc:sldMkLst>
           <pc:docMk/>
           <pc:sldMk cId="2408984607" sldId="263"/>
         </pc:sldMkLst>
         <pc:spChg chg="add mod">
-          <ac:chgData name="Weber, Walter E" userId="S::ke9712wb@go.minnstate.edu::04fb7385-cd6c-43f1-bcbc-0e8fd80cc4d2" providerId="AD" clId="Web-{4CF7F5C5-5D92-003F-7452-B2B7749D4642}" dt="2026-02-28T20:56:20.902" v="298" actId="1076"/>
+          <ac:chgData name="Weber, Walter E" userId="S::ke9712wb@go.minnstate.edu::04fb7385-cd6c-43f1-bcbc-0e8fd80cc4d2" providerId="AD" clId="Web-{4CF7F5C5-5D92-003F-7452-B2B7749D4642}" dt="2026-02-28T21:24:45.989" v="744" actId="20577"/>
           <ac:spMkLst>
             <pc:docMk/>
             <pc:sldMk cId="2408984607" sldId="263"/>
@@ -311,15 +636,23 @@
           </ac:spMkLst>
         </pc:spChg>
         <pc:spChg chg="add mod">
-          <ac:chgData name="Weber, Walter E" userId="S::ke9712wb@go.minnstate.edu::04fb7385-cd6c-43f1-bcbc-0e8fd80cc4d2" providerId="AD" clId="Web-{4CF7F5C5-5D92-003F-7452-B2B7749D4642}" dt="2026-02-28T20:56:26.855" v="299" actId="1076"/>
+          <ac:chgData name="Weber, Walter E" userId="S::ke9712wb@go.minnstate.edu::04fb7385-cd6c-43f1-bcbc-0e8fd80cc4d2" providerId="AD" clId="Web-{4CF7F5C5-5D92-003F-7452-B2B7749D4642}" dt="2026-02-28T21:24:39.020" v="743" actId="20577"/>
           <ac:spMkLst>
             <pc:docMk/>
             <pc:sldMk cId="2408984607" sldId="263"/>
             <ac:spMk id="4" creationId="{DFF1EA4B-747D-53BE-9C84-7C3FFF6DC4D8}"/>
           </ac:spMkLst>
         </pc:spChg>
+        <pc:spChg chg="add mod">
+          <ac:chgData name="Weber, Walter E" userId="S::ke9712wb@go.minnstate.edu::04fb7385-cd6c-43f1-bcbc-0e8fd80cc4d2" providerId="AD" clId="Web-{4CF7F5C5-5D92-003F-7452-B2B7749D4642}" dt="2026-02-28T21:24:55.176" v="745" actId="20577"/>
+          <ac:spMkLst>
+            <pc:docMk/>
+            <pc:sldMk cId="2408984607" sldId="263"/>
+            <ac:spMk id="5" creationId="{FE78A168-E418-58FB-3B03-F216CE80888D}"/>
+          </ac:spMkLst>
+        </pc:spChg>
         <pc:picChg chg="add mod">
-          <ac:chgData name="Weber, Walter E" userId="S::ke9712wb@go.minnstate.edu::04fb7385-cd6c-43f1-bcbc-0e8fd80cc4d2" providerId="AD" clId="Web-{4CF7F5C5-5D92-003F-7452-B2B7749D4642}" dt="2026-02-28T20:56:32.402" v="300" actId="1076"/>
+          <ac:chgData name="Weber, Walter E" userId="S::ke9712wb@go.minnstate.edu::04fb7385-cd6c-43f1-bcbc-0e8fd80cc4d2" providerId="AD" clId="Web-{4CF7F5C5-5D92-003F-7452-B2B7749D4642}" dt="2026-02-28T21:04:05.386" v="599" actId="14100"/>
           <ac:picMkLst>
             <pc:docMk/>
             <pc:sldMk cId="2408984607" sldId="263"/>
@@ -327,12 +660,42 @@
           </ac:picMkLst>
         </pc:picChg>
       </pc:sldChg>
+      <pc:sldChg chg="addSp modSp">
+        <pc:chgData name="Weber, Walter E" userId="S::ke9712wb@go.minnstate.edu::04fb7385-cd6c-43f1-bcbc-0e8fd80cc4d2" providerId="AD" clId="Web-{4CF7F5C5-5D92-003F-7452-B2B7749D4642}" dt="2026-02-28T21:39:01.685" v="907" actId="20577"/>
+        <pc:sldMkLst>
+          <pc:docMk/>
+          <pc:sldMk cId="2635568907" sldId="270"/>
+        </pc:sldMkLst>
+        <pc:spChg chg="add mod">
+          <ac:chgData name="Weber, Walter E" userId="S::ke9712wb@go.minnstate.edu::04fb7385-cd6c-43f1-bcbc-0e8fd80cc4d2" providerId="AD" clId="Web-{4CF7F5C5-5D92-003F-7452-B2B7749D4642}" dt="2026-02-28T21:39:01.685" v="907" actId="20577"/>
+          <ac:spMkLst>
+            <pc:docMk/>
+            <pc:sldMk cId="2635568907" sldId="270"/>
+            <ac:spMk id="3" creationId="{87CAFC03-C6C7-98AA-21A0-CA224D98C899}"/>
+          </ac:spMkLst>
+        </pc:spChg>
+      </pc:sldChg>
+      <pc:sldChg chg="addSp modSp new del">
+        <pc:chgData name="Weber, Walter E" userId="S::ke9712wb@go.minnstate.edu::04fb7385-cd6c-43f1-bcbc-0e8fd80cc4d2" providerId="AD" clId="Web-{4CF7F5C5-5D92-003F-7452-B2B7749D4642}" dt="2026-02-28T21:38:35.435" v="887"/>
+        <pc:sldMkLst>
+          <pc:docMk/>
+          <pc:sldMk cId="961236055" sldId="271"/>
+        </pc:sldMkLst>
+        <pc:spChg chg="add mod">
+          <ac:chgData name="Weber, Walter E" userId="S::ke9712wb@go.minnstate.edu::04fb7385-cd6c-43f1-bcbc-0e8fd80cc4d2" providerId="AD" clId="Web-{4CF7F5C5-5D92-003F-7452-B2B7749D4642}" dt="2026-02-28T21:38:29.607" v="886" actId="20577"/>
+          <ac:spMkLst>
+            <pc:docMk/>
+            <pc:sldMk cId="961236055" sldId="271"/>
+            <ac:spMk id="2" creationId="{620C3E5D-9542-17FB-76C3-A0BF3A164BF2}"/>
+          </ac:spMkLst>
+        </pc:spChg>
+      </pc:sldChg>
     </pc:docChg>
   </pc:docChgLst>
   <pc:docChgLst>
     <pc:chgData name="McKinzie, Ian D" userId="S::hc2176sr@go.minnstate.edu::52c18634-876e-4914-b9b5-230e12b94111" providerId="AD" clId="Web-{FA9F7397-AC26-1A94-8469-3EB642366FE5}"/>
-    <pc:docChg chg="mod modSld addMainMaster delMainMaster">
-      <pc:chgData name="McKinzie, Ian D" userId="S::hc2176sr@go.minnstate.edu::52c18634-876e-4914-b9b5-230e12b94111" providerId="AD" clId="Web-{FA9F7397-AC26-1A94-8469-3EB642366FE5}" dt="2026-02-28T20:30:54.096" v="117"/>
+    <pc:docChg chg="mod addSld modSld addMainMaster delMainMaster">
+      <pc:chgData name="McKinzie, Ian D" userId="S::hc2176sr@go.minnstate.edu::52c18634-876e-4914-b9b5-230e12b94111" providerId="AD" clId="Web-{FA9F7397-AC26-1A94-8469-3EB642366FE5}" dt="2026-02-28T21:38:39.591" v="312" actId="20577"/>
       <pc:docMkLst>
         <pc:docMk/>
       </pc:docMkLst>
@@ -559,40 +922,232 @@
           </ac:picMkLst>
         </pc:picChg>
       </pc:sldChg>
-      <pc:sldChg chg="mod modClrScheme chgLayout">
-        <pc:chgData name="McKinzie, Ian D" userId="S::hc2176sr@go.minnstate.edu::52c18634-876e-4914-b9b5-230e12b94111" providerId="AD" clId="Web-{FA9F7397-AC26-1A94-8469-3EB642366FE5}" dt="2026-02-28T20:30:54.096" v="117"/>
+      <pc:sldChg chg="modSp mod modClrScheme chgLayout">
+        <pc:chgData name="McKinzie, Ian D" userId="S::hc2176sr@go.minnstate.edu::52c18634-876e-4914-b9b5-230e12b94111" providerId="AD" clId="Web-{FA9F7397-AC26-1A94-8469-3EB642366FE5}" dt="2026-02-28T21:32:45.150" v="233" actId="20577"/>
         <pc:sldMkLst>
           <pc:docMk/>
           <pc:sldMk cId="1461446620" sldId="258"/>
         </pc:sldMkLst>
+        <pc:spChg chg="mod">
+          <ac:chgData name="McKinzie, Ian D" userId="S::hc2176sr@go.minnstate.edu::52c18634-876e-4914-b9b5-230e12b94111" providerId="AD" clId="Web-{FA9F7397-AC26-1A94-8469-3EB642366FE5}" dt="2026-02-28T21:32:45.150" v="233" actId="20577"/>
+          <ac:spMkLst>
+            <pc:docMk/>
+            <pc:sldMk cId="1461446620" sldId="258"/>
+            <ac:spMk id="3" creationId="{624553A7-5217-C92E-EE8C-2B999E346ABD}"/>
+          </ac:spMkLst>
+        </pc:spChg>
       </pc:sldChg>
-      <pc:sldChg chg="mod modClrScheme chgLayout">
-        <pc:chgData name="McKinzie, Ian D" userId="S::hc2176sr@go.minnstate.edu::52c18634-876e-4914-b9b5-230e12b94111" providerId="AD" clId="Web-{FA9F7397-AC26-1A94-8469-3EB642366FE5}" dt="2026-02-28T20:30:54.096" v="117"/>
+      <pc:sldChg chg="modSp mod modClrScheme chgLayout">
+        <pc:chgData name="McKinzie, Ian D" userId="S::hc2176sr@go.minnstate.edu::52c18634-876e-4914-b9b5-230e12b94111" providerId="AD" clId="Web-{FA9F7397-AC26-1A94-8469-3EB642366FE5}" dt="2026-02-28T21:34:58.838" v="285" actId="20577"/>
         <pc:sldMkLst>
           <pc:docMk/>
           <pc:sldMk cId="2557246359" sldId="259"/>
         </pc:sldMkLst>
+        <pc:spChg chg="mod">
+          <ac:chgData name="McKinzie, Ian D" userId="S::hc2176sr@go.minnstate.edu::52c18634-876e-4914-b9b5-230e12b94111" providerId="AD" clId="Web-{FA9F7397-AC26-1A94-8469-3EB642366FE5}" dt="2026-02-28T21:34:51.541" v="283" actId="20577"/>
+          <ac:spMkLst>
+            <pc:docMk/>
+            <pc:sldMk cId="2557246359" sldId="259"/>
+            <ac:spMk id="2" creationId="{34B13AE6-6445-05CA-312E-2376A93A06DE}"/>
+          </ac:spMkLst>
+        </pc:spChg>
+        <pc:spChg chg="mod">
+          <ac:chgData name="McKinzie, Ian D" userId="S::hc2176sr@go.minnstate.edu::52c18634-876e-4914-b9b5-230e12b94111" providerId="AD" clId="Web-{FA9F7397-AC26-1A94-8469-3EB642366FE5}" dt="2026-02-28T21:34:58.838" v="285" actId="20577"/>
+          <ac:spMkLst>
+            <pc:docMk/>
+            <pc:sldMk cId="2557246359" sldId="259"/>
+            <ac:spMk id="5" creationId="{856EF08C-A5CF-5E5E-936D-B47B450A6718}"/>
+          </ac:spMkLst>
+        </pc:spChg>
       </pc:sldChg>
-      <pc:sldChg chg="mod modClrScheme chgLayout">
-        <pc:chgData name="McKinzie, Ian D" userId="S::hc2176sr@go.minnstate.edu::52c18634-876e-4914-b9b5-230e12b94111" providerId="AD" clId="Web-{FA9F7397-AC26-1A94-8469-3EB642366FE5}" dt="2026-02-28T20:30:54.096" v="117"/>
+      <pc:sldChg chg="modSp mod modClrScheme chgLayout">
+        <pc:chgData name="McKinzie, Ian D" userId="S::hc2176sr@go.minnstate.edu::52c18634-876e-4914-b9b5-230e12b94111" providerId="AD" clId="Web-{FA9F7397-AC26-1A94-8469-3EB642366FE5}" dt="2026-02-28T21:34:13.494" v="260" actId="20577"/>
         <pc:sldMkLst>
           <pc:docMk/>
           <pc:sldMk cId="3542396603" sldId="260"/>
         </pc:sldMkLst>
+        <pc:spChg chg="mod">
+          <ac:chgData name="McKinzie, Ian D" userId="S::hc2176sr@go.minnstate.edu::52c18634-876e-4914-b9b5-230e12b94111" providerId="AD" clId="Web-{FA9F7397-AC26-1A94-8469-3EB642366FE5}" dt="2026-02-28T21:34:13.494" v="260" actId="20577"/>
+          <ac:spMkLst>
+            <pc:docMk/>
+            <pc:sldMk cId="3542396603" sldId="260"/>
+            <ac:spMk id="2" creationId="{B108EAAF-A577-EC42-D41E-E9B6F8B770AB}"/>
+          </ac:spMkLst>
+        </pc:spChg>
       </pc:sldChg>
-      <pc:sldChg chg="mod modClrScheme chgLayout">
-        <pc:chgData name="McKinzie, Ian D" userId="S::hc2176sr@go.minnstate.edu::52c18634-876e-4914-b9b5-230e12b94111" providerId="AD" clId="Web-{FA9F7397-AC26-1A94-8469-3EB642366FE5}" dt="2026-02-28T20:30:54.096" v="117"/>
+      <pc:sldChg chg="modSp mod modClrScheme chgLayout">
+        <pc:chgData name="McKinzie, Ian D" userId="S::hc2176sr@go.minnstate.edu::52c18634-876e-4914-b9b5-230e12b94111" providerId="AD" clId="Web-{FA9F7397-AC26-1A94-8469-3EB642366FE5}" dt="2026-02-28T21:33:09.619" v="237" actId="20577"/>
         <pc:sldMkLst>
           <pc:docMk/>
           <pc:sldMk cId="3221513061" sldId="261"/>
         </pc:sldMkLst>
+        <pc:spChg chg="mod">
+          <ac:chgData name="McKinzie, Ian D" userId="S::hc2176sr@go.minnstate.edu::52c18634-876e-4914-b9b5-230e12b94111" providerId="AD" clId="Web-{FA9F7397-AC26-1A94-8469-3EB642366FE5}" dt="2026-02-28T21:33:09.619" v="237" actId="20577"/>
+          <ac:spMkLst>
+            <pc:docMk/>
+            <pc:sldMk cId="3221513061" sldId="261"/>
+            <ac:spMk id="4" creationId="{19E91DE6-B179-D335-6597-08A5753B28DF}"/>
+          </ac:spMkLst>
+        </pc:spChg>
       </pc:sldChg>
-      <pc:sldChg chg="mod modClrScheme chgLayout">
-        <pc:chgData name="McKinzie, Ian D" userId="S::hc2176sr@go.minnstate.edu::52c18634-876e-4914-b9b5-230e12b94111" providerId="AD" clId="Web-{FA9F7397-AC26-1A94-8469-3EB642366FE5}" dt="2026-02-28T20:30:54.096" v="117"/>
+      <pc:sldChg chg="modSp mod modClrScheme chgLayout">
+        <pc:chgData name="McKinzie, Ian D" userId="S::hc2176sr@go.minnstate.edu::52c18634-876e-4914-b9b5-230e12b94111" providerId="AD" clId="Web-{FA9F7397-AC26-1A94-8469-3EB642366FE5}" dt="2026-02-28T21:34:38.947" v="281" actId="20577"/>
         <pc:sldMkLst>
           <pc:docMk/>
           <pc:sldMk cId="2486051660" sldId="262"/>
         </pc:sldMkLst>
+        <pc:spChg chg="mod">
+          <ac:chgData name="McKinzie, Ian D" userId="S::hc2176sr@go.minnstate.edu::52c18634-876e-4914-b9b5-230e12b94111" providerId="AD" clId="Web-{FA9F7397-AC26-1A94-8469-3EB642366FE5}" dt="2026-02-28T21:34:38.947" v="281" actId="20577"/>
+          <ac:spMkLst>
+            <pc:docMk/>
+            <pc:sldMk cId="2486051660" sldId="262"/>
+            <ac:spMk id="3" creationId="{B70C430F-56B2-7312-F01C-B022BD07393C}"/>
+          </ac:spMkLst>
+        </pc:spChg>
+      </pc:sldChg>
+      <pc:sldChg chg="modSp">
+        <pc:chgData name="McKinzie, Ian D" userId="S::hc2176sr@go.minnstate.edu::52c18634-876e-4914-b9b5-230e12b94111" providerId="AD" clId="Web-{FA9F7397-AC26-1A94-8469-3EB642366FE5}" dt="2026-02-28T21:32:57.072" v="235" actId="20577"/>
+        <pc:sldMkLst>
+          <pc:docMk/>
+          <pc:sldMk cId="2408984607" sldId="263"/>
+        </pc:sldMkLst>
+        <pc:spChg chg="mod">
+          <ac:chgData name="McKinzie, Ian D" userId="S::hc2176sr@go.minnstate.edu::52c18634-876e-4914-b9b5-230e12b94111" providerId="AD" clId="Web-{FA9F7397-AC26-1A94-8469-3EB642366FE5}" dt="2026-02-28T21:32:57.072" v="235" actId="20577"/>
+          <ac:spMkLst>
+            <pc:docMk/>
+            <pc:sldMk cId="2408984607" sldId="263"/>
+            <ac:spMk id="3" creationId="{D0DFA83B-231C-0C9A-2549-7CF0FD9895E6}"/>
+          </ac:spMkLst>
+        </pc:spChg>
+        <pc:spChg chg="mod">
+          <ac:chgData name="McKinzie, Ian D" userId="S::hc2176sr@go.minnstate.edu::52c18634-876e-4914-b9b5-230e12b94111" providerId="AD" clId="Web-{FA9F7397-AC26-1A94-8469-3EB642366FE5}" dt="2026-02-28T21:23:05.046" v="176" actId="20577"/>
+          <ac:spMkLst>
+            <pc:docMk/>
+            <pc:sldMk cId="2408984607" sldId="263"/>
+            <ac:spMk id="5" creationId="{FE78A168-E418-58FB-3B03-F216CE80888D}"/>
+          </ac:spMkLst>
+        </pc:spChg>
+      </pc:sldChg>
+      <pc:sldChg chg="modSp add replId">
+        <pc:chgData name="McKinzie, Ian D" userId="S::hc2176sr@go.minnstate.edu::52c18634-876e-4914-b9b5-230e12b94111" providerId="AD" clId="Web-{FA9F7397-AC26-1A94-8469-3EB642366FE5}" dt="2026-02-28T21:32:19.869" v="231" actId="20577"/>
+        <pc:sldMkLst>
+          <pc:docMk/>
+          <pc:sldMk cId="4256159325" sldId="264"/>
+        </pc:sldMkLst>
+        <pc:spChg chg="mod">
+          <ac:chgData name="McKinzie, Ian D" userId="S::hc2176sr@go.minnstate.edu::52c18634-876e-4914-b9b5-230e12b94111" providerId="AD" clId="Web-{FA9F7397-AC26-1A94-8469-3EB642366FE5}" dt="2026-02-28T21:32:19.869" v="231" actId="20577"/>
+          <ac:spMkLst>
+            <pc:docMk/>
+            <pc:sldMk cId="4256159325" sldId="264"/>
+            <ac:spMk id="3" creationId="{9A507855-AED7-298A-9634-C2ED25EAF518}"/>
+          </ac:spMkLst>
+        </pc:spChg>
+        <pc:spChg chg="mod">
+          <ac:chgData name="McKinzie, Ian D" userId="S::hc2176sr@go.minnstate.edu::52c18634-876e-4914-b9b5-230e12b94111" providerId="AD" clId="Web-{FA9F7397-AC26-1A94-8469-3EB642366FE5}" dt="2026-02-28T21:31:34.822" v="189" actId="20577"/>
+          <ac:spMkLst>
+            <pc:docMk/>
+            <pc:sldMk cId="4256159325" sldId="264"/>
+            <ac:spMk id="7" creationId="{636CC0DC-95D8-6257-2896-8987AFCB7A0B}"/>
+          </ac:spMkLst>
+        </pc:spChg>
+      </pc:sldChg>
+      <pc:sldChg chg="modSp add replId">
+        <pc:chgData name="McKinzie, Ian D" userId="S::hc2176sr@go.minnstate.edu::52c18634-876e-4914-b9b5-230e12b94111" providerId="AD" clId="Web-{FA9F7397-AC26-1A94-8469-3EB642366FE5}" dt="2026-02-28T21:32:12.385" v="229" actId="20577"/>
+        <pc:sldMkLst>
+          <pc:docMk/>
+          <pc:sldMk cId="3738759402" sldId="265"/>
+        </pc:sldMkLst>
+        <pc:spChg chg="mod">
+          <ac:chgData name="McKinzie, Ian D" userId="S::hc2176sr@go.minnstate.edu::52c18634-876e-4914-b9b5-230e12b94111" providerId="AD" clId="Web-{FA9F7397-AC26-1A94-8469-3EB642366FE5}" dt="2026-02-28T21:32:12.385" v="229" actId="20577"/>
+          <ac:spMkLst>
+            <pc:docMk/>
+            <pc:sldMk cId="3738759402" sldId="265"/>
+            <ac:spMk id="3" creationId="{4B5922F2-ACFA-BCF1-5823-1817A87A997E}"/>
+          </ac:spMkLst>
+        </pc:spChg>
+        <pc:spChg chg="mod">
+          <ac:chgData name="McKinzie, Ian D" userId="S::hc2176sr@go.minnstate.edu::52c18634-876e-4914-b9b5-230e12b94111" providerId="AD" clId="Web-{FA9F7397-AC26-1A94-8469-3EB642366FE5}" dt="2026-02-28T21:32:02.572" v="223" actId="20577"/>
+          <ac:spMkLst>
+            <pc:docMk/>
+            <pc:sldMk cId="3738759402" sldId="265"/>
+            <ac:spMk id="5" creationId="{3BD2FD1A-4DC7-C4CD-4AD5-91D1D2CE691B}"/>
+          </ac:spMkLst>
+        </pc:spChg>
+      </pc:sldChg>
+      <pc:sldChg chg="add replId">
+        <pc:chgData name="McKinzie, Ian D" userId="S::hc2176sr@go.minnstate.edu::52c18634-876e-4914-b9b5-230e12b94111" providerId="AD" clId="Web-{FA9F7397-AC26-1A94-8469-3EB642366FE5}" dt="2026-02-28T21:12:30.944" v="120"/>
+        <pc:sldMkLst>
+          <pc:docMk/>
+          <pc:sldMk cId="1561312112" sldId="266"/>
+        </pc:sldMkLst>
+      </pc:sldChg>
+      <pc:sldChg chg="modSp">
+        <pc:chgData name="McKinzie, Ian D" userId="S::hc2176sr@go.minnstate.edu::52c18634-876e-4914-b9b5-230e12b94111" providerId="AD" clId="Web-{FA9F7397-AC26-1A94-8469-3EB642366FE5}" dt="2026-02-28T21:33:48.026" v="247" actId="1076"/>
+        <pc:sldMkLst>
+          <pc:docMk/>
+          <pc:sldMk cId="2205884802" sldId="267"/>
+        </pc:sldMkLst>
+        <pc:spChg chg="mod">
+          <ac:chgData name="McKinzie, Ian D" userId="S::hc2176sr@go.minnstate.edu::52c18634-876e-4914-b9b5-230e12b94111" providerId="AD" clId="Web-{FA9F7397-AC26-1A94-8469-3EB642366FE5}" dt="2026-02-28T21:33:30.604" v="244" actId="20577"/>
+          <ac:spMkLst>
+            <pc:docMk/>
+            <pc:sldMk cId="2205884802" sldId="267"/>
+            <ac:spMk id="3" creationId="{E7150560-FDEA-AEE0-D169-4B641397D91E}"/>
+          </ac:spMkLst>
+        </pc:spChg>
+        <pc:spChg chg="mod">
+          <ac:chgData name="McKinzie, Ian D" userId="S::hc2176sr@go.minnstate.edu::52c18634-876e-4914-b9b5-230e12b94111" providerId="AD" clId="Web-{FA9F7397-AC26-1A94-8469-3EB642366FE5}" dt="2026-02-28T21:33:25.041" v="240" actId="20577"/>
+          <ac:spMkLst>
+            <pc:docMk/>
+            <pc:sldMk cId="2205884802" sldId="267"/>
+            <ac:spMk id="4" creationId="{8B9EB567-D992-BD9D-8CD2-9017590843E9}"/>
+          </ac:spMkLst>
+        </pc:spChg>
+        <pc:spChg chg="mod">
+          <ac:chgData name="McKinzie, Ian D" userId="S::hc2176sr@go.minnstate.edu::52c18634-876e-4914-b9b5-230e12b94111" providerId="AD" clId="Web-{FA9F7397-AC26-1A94-8469-3EB642366FE5}" dt="2026-02-28T21:33:48.026" v="247" actId="1076"/>
+          <ac:spMkLst>
+            <pc:docMk/>
+            <pc:sldMk cId="2205884802" sldId="267"/>
+            <ac:spMk id="6" creationId="{B54B4B66-D7E9-1406-64DC-50F3227259FC}"/>
+          </ac:spMkLst>
+        </pc:spChg>
+      </pc:sldChg>
+      <pc:sldChg chg="add replId">
+        <pc:chgData name="McKinzie, Ian D" userId="S::hc2176sr@go.minnstate.edu::52c18634-876e-4914-b9b5-230e12b94111" providerId="AD" clId="Web-{FA9F7397-AC26-1A94-8469-3EB642366FE5}" dt="2026-02-28T21:38:02.106" v="286"/>
+        <pc:sldMkLst>
+          <pc:docMk/>
+          <pc:sldMk cId="1615472381" sldId="268"/>
+        </pc:sldMkLst>
+      </pc:sldChg>
+      <pc:sldChg chg="add replId">
+        <pc:chgData name="McKinzie, Ian D" userId="S::hc2176sr@go.minnstate.edu::52c18634-876e-4914-b9b5-230e12b94111" providerId="AD" clId="Web-{FA9F7397-AC26-1A94-8469-3EB642366FE5}" dt="2026-02-28T21:38:06.340" v="287"/>
+        <pc:sldMkLst>
+          <pc:docMk/>
+          <pc:sldMk cId="2119702881" sldId="269"/>
+        </pc:sldMkLst>
+      </pc:sldChg>
+      <pc:sldChg chg="delSp modSp add replId">
+        <pc:chgData name="McKinzie, Ian D" userId="S::hc2176sr@go.minnstate.edu::52c18634-876e-4914-b9b5-230e12b94111" providerId="AD" clId="Web-{FA9F7397-AC26-1A94-8469-3EB642366FE5}" dt="2026-02-28T21:38:39.591" v="312" actId="20577"/>
+        <pc:sldMkLst>
+          <pc:docMk/>
+          <pc:sldMk cId="2635568907" sldId="270"/>
+        </pc:sldMkLst>
+        <pc:spChg chg="mod">
+          <ac:chgData name="McKinzie, Ian D" userId="S::hc2176sr@go.minnstate.edu::52c18634-876e-4914-b9b5-230e12b94111" providerId="AD" clId="Web-{FA9F7397-AC26-1A94-8469-3EB642366FE5}" dt="2026-02-28T21:38:39.591" v="312" actId="20577"/>
+          <ac:spMkLst>
+            <pc:docMk/>
+            <pc:sldMk cId="2635568907" sldId="270"/>
+            <ac:spMk id="2" creationId="{903F5F9F-65DC-CA06-58F9-CADC08124898}"/>
+          </ac:spMkLst>
+        </pc:spChg>
+        <pc:spChg chg="del mod">
+          <ac:chgData name="McKinzie, Ian D" userId="S::hc2176sr@go.minnstate.edu::52c18634-876e-4914-b9b5-230e12b94111" providerId="AD" clId="Web-{FA9F7397-AC26-1A94-8469-3EB642366FE5}" dt="2026-02-28T21:38:12.731" v="291"/>
+          <ac:spMkLst>
+            <pc:docMk/>
+            <pc:sldMk cId="2635568907" sldId="270"/>
+            <ac:spMk id="5" creationId="{05BA62EC-E073-061D-B0F7-698CCF7F52DE}"/>
+          </ac:spMkLst>
+        </pc:spChg>
       </pc:sldChg>
       <pc:sldMasterChg chg="del delSldLayout">
         <pc:chgData name="McKinzie, Ian D" userId="S::hc2176sr@go.minnstate.edu::52c18634-876e-4914-b9b5-230e12b94111" providerId="AD" clId="Web-{FA9F7397-AC26-1A94-8469-3EB642366FE5}" dt="2026-02-28T20:07:15.610" v="49"/>
@@ -1980,18 +2535,18 @@
   <pc:docChgLst>
     <pc:chgData name="Michel, Trevor A" userId="S::xu6189ne@go.minnstate.edu::47b47093-98c3-464d-b84b-139362f373ea" providerId="AD" clId="Web-{716F47B6-388F-B64A-3513-975C7EA96578}"/>
     <pc:docChg chg="addSld modSld">
-      <pc:chgData name="Michel, Trevor A" userId="S::xu6189ne@go.minnstate.edu::47b47093-98c3-464d-b84b-139362f373ea" providerId="AD" clId="Web-{716F47B6-388F-B64A-3513-975C7EA96578}" dt="2026-02-28T20:29:56.071" v="178" actId="1076"/>
+      <pc:chgData name="Michel, Trevor A" userId="S::xu6189ne@go.minnstate.edu::47b47093-98c3-464d-b84b-139362f373ea" providerId="AD" clId="Web-{716F47B6-388F-B64A-3513-975C7EA96578}" dt="2026-02-28T21:36:09.526" v="568" actId="1076"/>
       <pc:docMkLst>
         <pc:docMk/>
       </pc:docMkLst>
-      <pc:sldChg chg="addSp modSp">
-        <pc:chgData name="Michel, Trevor A" userId="S::xu6189ne@go.minnstate.edu::47b47093-98c3-464d-b84b-139362f373ea" providerId="AD" clId="Web-{716F47B6-388F-B64A-3513-975C7EA96578}" dt="2026-02-28T20:29:56.071" v="178" actId="1076"/>
+      <pc:sldChg chg="addSp delSp modSp">
+        <pc:chgData name="Michel, Trevor A" userId="S::xu6189ne@go.minnstate.edu::47b47093-98c3-464d-b84b-139362f373ea" providerId="AD" clId="Web-{716F47B6-388F-B64A-3513-975C7EA96578}" dt="2026-02-28T21:28:50.821" v="485" actId="14100"/>
         <pc:sldMkLst>
           <pc:docMk/>
           <pc:sldMk cId="3542396603" sldId="260"/>
         </pc:sldMkLst>
         <pc:spChg chg="mod">
-          <ac:chgData name="Michel, Trevor A" userId="S::xu6189ne@go.minnstate.edu::47b47093-98c3-464d-b84b-139362f373ea" providerId="AD" clId="Web-{716F47B6-388F-B64A-3513-975C7EA96578}" dt="2026-02-28T20:23:40.944" v="116" actId="1076"/>
+          <ac:chgData name="Michel, Trevor A" userId="S::xu6189ne@go.minnstate.edu::47b47093-98c3-464d-b84b-139362f373ea" providerId="AD" clId="Web-{716F47B6-388F-B64A-3513-975C7EA96578}" dt="2026-02-28T21:28:50.821" v="485" actId="14100"/>
           <ac:spMkLst>
             <pc:docMk/>
             <pc:sldMk cId="3542396603" sldId="260"/>
@@ -1999,7 +2554,7 @@
           </ac:spMkLst>
         </pc:spChg>
         <pc:spChg chg="add mod">
-          <ac:chgData name="Michel, Trevor A" userId="S::xu6189ne@go.minnstate.edu::47b47093-98c3-464d-b84b-139362f373ea" providerId="AD" clId="Web-{716F47B6-388F-B64A-3513-975C7EA96578}" dt="2026-02-28T20:29:37.477" v="174" actId="1076"/>
+          <ac:chgData name="Michel, Trevor A" userId="S::xu6189ne@go.minnstate.edu::47b47093-98c3-464d-b84b-139362f373ea" providerId="AD" clId="Web-{716F47B6-388F-B64A-3513-975C7EA96578}" dt="2026-02-28T21:22:07.381" v="428"/>
           <ac:spMkLst>
             <pc:docMk/>
             <pc:sldMk cId="3542396603" sldId="260"/>
@@ -2007,7 +2562,7 @@
           </ac:spMkLst>
         </pc:spChg>
         <pc:spChg chg="add mod">
-          <ac:chgData name="Michel, Trevor A" userId="S::xu6189ne@go.minnstate.edu::47b47093-98c3-464d-b84b-139362f373ea" providerId="AD" clId="Web-{716F47B6-388F-B64A-3513-975C7EA96578}" dt="2026-02-28T20:29:56.071" v="178" actId="1076"/>
+          <ac:chgData name="Michel, Trevor A" userId="S::xu6189ne@go.minnstate.edu::47b47093-98c3-464d-b84b-139362f373ea" providerId="AD" clId="Web-{716F47B6-388F-B64A-3513-975C7EA96578}" dt="2026-02-28T21:22:07.381" v="429"/>
           <ac:spMkLst>
             <pc:docMk/>
             <pc:sldMk cId="3542396603" sldId="260"/>
@@ -2015,7 +2570,7 @@
           </ac:spMkLst>
         </pc:spChg>
         <pc:spChg chg="add mod">
-          <ac:chgData name="Michel, Trevor A" userId="S::xu6189ne@go.minnstate.edu::47b47093-98c3-464d-b84b-139362f373ea" providerId="AD" clId="Web-{716F47B6-388F-B64A-3513-975C7EA96578}" dt="2026-02-28T20:29:43.212" v="176" actId="1076"/>
+          <ac:chgData name="Michel, Trevor A" userId="S::xu6189ne@go.minnstate.edu::47b47093-98c3-464d-b84b-139362f373ea" providerId="AD" clId="Web-{716F47B6-388F-B64A-3513-975C7EA96578}" dt="2026-02-28T21:22:07.381" v="430"/>
           <ac:spMkLst>
             <pc:docMk/>
             <pc:sldMk cId="3542396603" sldId="260"/>
@@ -2023,15 +2578,31 @@
           </ac:spMkLst>
         </pc:spChg>
         <pc:spChg chg="add mod">
-          <ac:chgData name="Michel, Trevor A" userId="S::xu6189ne@go.minnstate.edu::47b47093-98c3-464d-b84b-139362f373ea" providerId="AD" clId="Web-{716F47B6-388F-B64A-3513-975C7EA96578}" dt="2026-02-28T20:29:49.446" v="177" actId="1076"/>
+          <ac:chgData name="Michel, Trevor A" userId="S::xu6189ne@go.minnstate.edu::47b47093-98c3-464d-b84b-139362f373ea" providerId="AD" clId="Web-{716F47B6-388F-B64A-3513-975C7EA96578}" dt="2026-02-28T21:21:59.834" v="426" actId="20577"/>
           <ac:spMkLst>
             <pc:docMk/>
             <pc:sldMk cId="3542396603" sldId="260"/>
             <ac:spMk id="8" creationId="{F30D0C0D-94E7-1197-0084-416422FCB1A5}"/>
           </ac:spMkLst>
         </pc:spChg>
+        <pc:spChg chg="add del mod">
+          <ac:chgData name="Michel, Trevor A" userId="S::xu6189ne@go.minnstate.edu::47b47093-98c3-464d-b84b-139362f373ea" providerId="AD" clId="Web-{716F47B6-388F-B64A-3513-975C7EA96578}" dt="2026-02-28T21:07:25.239" v="195"/>
+          <ac:spMkLst>
+            <pc:docMk/>
+            <pc:sldMk cId="3542396603" sldId="260"/>
+            <ac:spMk id="9" creationId="{FC3C5C5B-9C48-031F-DF2D-5AC508E46F63}"/>
+          </ac:spMkLst>
+        </pc:spChg>
+        <pc:spChg chg="add mod">
+          <ac:chgData name="Michel, Trevor A" userId="S::xu6189ne@go.minnstate.edu::47b47093-98c3-464d-b84b-139362f373ea" providerId="AD" clId="Web-{716F47B6-388F-B64A-3513-975C7EA96578}" dt="2026-02-28T21:22:07.412" v="431"/>
+          <ac:spMkLst>
+            <pc:docMk/>
+            <pc:sldMk cId="3542396603" sldId="260"/>
+            <ac:spMk id="10" creationId="{122EFE42-5CDB-273D-0548-05CD2EC27798}"/>
+          </ac:spMkLst>
+        </pc:spChg>
         <pc:picChg chg="add mod">
-          <ac:chgData name="Michel, Trevor A" userId="S::xu6189ne@go.minnstate.edu::47b47093-98c3-464d-b84b-139362f373ea" providerId="AD" clId="Web-{716F47B6-388F-B64A-3513-975C7EA96578}" dt="2026-02-28T20:28:59.477" v="172" actId="14100"/>
+          <ac:chgData name="Michel, Trevor A" userId="S::xu6189ne@go.minnstate.edu::47b47093-98c3-464d-b84b-139362f373ea" providerId="AD" clId="Web-{716F47B6-388F-B64A-3513-975C7EA96578}" dt="2026-02-28T21:04:21.263" v="182" actId="14100"/>
           <ac:picMkLst>
             <pc:docMk/>
             <pc:sldMk cId="3542396603" sldId="260"/>
@@ -2039,7 +2610,7 @@
           </ac:picMkLst>
         </pc:picChg>
         <pc:picChg chg="add mod">
-          <ac:chgData name="Michel, Trevor A" userId="S::xu6189ne@go.minnstate.edu::47b47093-98c3-464d-b84b-139362f373ea" providerId="AD" clId="Web-{716F47B6-388F-B64A-3513-975C7EA96578}" dt="2026-02-28T20:28:54.321" v="171" actId="14100"/>
+          <ac:chgData name="Michel, Trevor A" userId="S::xu6189ne@go.minnstate.edu::47b47093-98c3-464d-b84b-139362f373ea" providerId="AD" clId="Web-{716F47B6-388F-B64A-3513-975C7EA96578}" dt="2026-02-28T21:04:04.747" v="179" actId="1076"/>
           <ac:picMkLst>
             <pc:docMk/>
             <pc:sldMk cId="3542396603" sldId="260"/>
@@ -2047,20 +2618,195 @@
           </ac:picMkLst>
         </pc:picChg>
       </pc:sldChg>
-      <pc:sldChg chg="addSp modSp new">
-        <pc:chgData name="Michel, Trevor A" userId="S::xu6189ne@go.minnstate.edu::47b47093-98c3-464d-b84b-139362f373ea" providerId="AD" clId="Web-{716F47B6-388F-B64A-3513-975C7EA96578}" dt="2026-02-28T20:18:15.597" v="4" actId="20577"/>
+      <pc:sldChg chg="addSp delSp modSp new">
+        <pc:chgData name="Michel, Trevor A" userId="S::xu6189ne@go.minnstate.edu::47b47093-98c3-464d-b84b-139362f373ea" providerId="AD" clId="Web-{716F47B6-388F-B64A-3513-975C7EA96578}" dt="2026-02-28T21:29:22.367" v="491" actId="20577"/>
         <pc:sldMkLst>
           <pc:docMk/>
           <pc:sldMk cId="2486051660" sldId="262"/>
         </pc:sldMkLst>
-        <pc:spChg chg="add mod">
-          <ac:chgData name="Michel, Trevor A" userId="S::xu6189ne@go.minnstate.edu::47b47093-98c3-464d-b84b-139362f373ea" providerId="AD" clId="Web-{716F47B6-388F-B64A-3513-975C7EA96578}" dt="2026-02-28T20:18:15.597" v="4" actId="20577"/>
+        <pc:spChg chg="add del mod">
+          <ac:chgData name="Michel, Trevor A" userId="S::xu6189ne@go.minnstate.edu::47b47093-98c3-464d-b84b-139362f373ea" providerId="AD" clId="Web-{716F47B6-388F-B64A-3513-975C7EA96578}" dt="2026-02-28T21:11:01.086" v="293"/>
           <ac:spMkLst>
             <pc:docMk/>
             <pc:sldMk cId="2486051660" sldId="262"/>
             <ac:spMk id="2" creationId="{824E0ABB-5C1A-7F4C-215F-D6D178343EF0}"/>
           </ac:spMkLst>
         </pc:spChg>
+        <pc:spChg chg="add mod">
+          <ac:chgData name="Michel, Trevor A" userId="S::xu6189ne@go.minnstate.edu::47b47093-98c3-464d-b84b-139362f373ea" providerId="AD" clId="Web-{716F47B6-388F-B64A-3513-975C7EA96578}" dt="2026-02-28T21:29:22.367" v="491" actId="20577"/>
+          <ac:spMkLst>
+            <pc:docMk/>
+            <pc:sldMk cId="2486051660" sldId="262"/>
+            <ac:spMk id="3" creationId="{B70C430F-56B2-7312-F01C-B022BD07393C}"/>
+          </ac:spMkLst>
+        </pc:spChg>
+        <pc:spChg chg="add del mod">
+          <ac:chgData name="Michel, Trevor A" userId="S::xu6189ne@go.minnstate.edu::47b47093-98c3-464d-b84b-139362f373ea" providerId="AD" clId="Web-{716F47B6-388F-B64A-3513-975C7EA96578}" dt="2026-02-28T21:12:17.792" v="299"/>
+          <ac:spMkLst>
+            <pc:docMk/>
+            <pc:sldMk cId="2486051660" sldId="262"/>
+            <ac:spMk id="4" creationId="{CEB70016-D571-0045-1F8C-E2D1B52A6BB3}"/>
+          </ac:spMkLst>
+        </pc:spChg>
+        <pc:spChg chg="add mod">
+          <ac:chgData name="Michel, Trevor A" userId="S::xu6189ne@go.minnstate.edu::47b47093-98c3-464d-b84b-139362f373ea" providerId="AD" clId="Web-{716F47B6-388F-B64A-3513-975C7EA96578}" dt="2026-02-28T21:19:19.047" v="353" actId="1076"/>
+          <ac:spMkLst>
+            <pc:docMk/>
+            <pc:sldMk cId="2486051660" sldId="262"/>
+            <ac:spMk id="7" creationId="{A1ED316A-2EFE-2DA7-207A-0485C115AD35}"/>
+          </ac:spMkLst>
+        </pc:spChg>
+        <pc:spChg chg="add mod">
+          <ac:chgData name="Michel, Trevor A" userId="S::xu6189ne@go.minnstate.edu::47b47093-98c3-464d-b84b-139362f373ea" providerId="AD" clId="Web-{716F47B6-388F-B64A-3513-975C7EA96578}" dt="2026-02-28T21:18:24.748" v="321"/>
+          <ac:spMkLst>
+            <pc:docMk/>
+            <pc:sldMk cId="2486051660" sldId="262"/>
+            <ac:spMk id="8" creationId="{EB324BC8-E8D8-F30D-81E4-7244DE53F9A6}"/>
+          </ac:spMkLst>
+        </pc:spChg>
+        <pc:spChg chg="add mod">
+          <ac:chgData name="Michel, Trevor A" userId="S::xu6189ne@go.minnstate.edu::47b47093-98c3-464d-b84b-139362f373ea" providerId="AD" clId="Web-{716F47B6-388F-B64A-3513-975C7EA96578}" dt="2026-02-28T21:20:33.814" v="385" actId="20577"/>
+          <ac:spMkLst>
+            <pc:docMk/>
+            <pc:sldMk cId="2486051660" sldId="262"/>
+            <ac:spMk id="9" creationId="{4C1FB342-5850-1522-1324-BA0F04F61CB3}"/>
+          </ac:spMkLst>
+        </pc:spChg>
+        <pc:spChg chg="add del">
+          <ac:chgData name="Michel, Trevor A" userId="S::xu6189ne@go.minnstate.edu::47b47093-98c3-464d-b84b-139362f373ea" providerId="AD" clId="Web-{716F47B6-388F-B64A-3513-975C7EA96578}" dt="2026-02-28T21:19:48.907" v="355"/>
+          <ac:spMkLst>
+            <pc:docMk/>
+            <pc:sldMk cId="2486051660" sldId="262"/>
+            <ac:spMk id="10" creationId="{8FCA6C15-194A-2298-8D3B-04582C294F71}"/>
+          </ac:spMkLst>
+        </pc:spChg>
+        <pc:spChg chg="add del">
+          <ac:chgData name="Michel, Trevor A" userId="S::xu6189ne@go.minnstate.edu::47b47093-98c3-464d-b84b-139362f373ea" providerId="AD" clId="Web-{716F47B6-388F-B64A-3513-975C7EA96578}" dt="2026-02-28T21:19:59.469" v="357"/>
+          <ac:spMkLst>
+            <pc:docMk/>
+            <pc:sldMk cId="2486051660" sldId="262"/>
+            <ac:spMk id="12" creationId="{A58B526B-3170-A485-0C9E-8C8B79EBB677}"/>
+          </ac:spMkLst>
+        </pc:spChg>
+        <pc:spChg chg="add mod">
+          <ac:chgData name="Michel, Trevor A" userId="S::xu6189ne@go.minnstate.edu::47b47093-98c3-464d-b84b-139362f373ea" providerId="AD" clId="Web-{716F47B6-388F-B64A-3513-975C7EA96578}" dt="2026-02-28T21:20:27.267" v="381" actId="20577"/>
+          <ac:spMkLst>
+            <pc:docMk/>
+            <pc:sldMk cId="2486051660" sldId="262"/>
+            <ac:spMk id="14" creationId="{ACC51D21-2D34-832F-582E-551578457215}"/>
+          </ac:spMkLst>
+        </pc:spChg>
+        <pc:picChg chg="add mod">
+          <ac:chgData name="Michel, Trevor A" userId="S::xu6189ne@go.minnstate.edu::47b47093-98c3-464d-b84b-139362f373ea" providerId="AD" clId="Web-{716F47B6-388F-B64A-3513-975C7EA96578}" dt="2026-02-28T21:17:20.980" v="312" actId="1076"/>
+          <ac:picMkLst>
+            <pc:docMk/>
+            <pc:sldMk cId="2486051660" sldId="262"/>
+            <ac:picMk id="5" creationId="{07EF14BC-4FB8-8305-16C3-31D6FADB8263}"/>
+          </ac:picMkLst>
+        </pc:picChg>
+        <pc:picChg chg="add mod">
+          <ac:chgData name="Michel, Trevor A" userId="S::xu6189ne@go.minnstate.edu::47b47093-98c3-464d-b84b-139362f373ea" providerId="AD" clId="Web-{716F47B6-388F-B64A-3513-975C7EA96578}" dt="2026-02-28T21:17:36.995" v="315" actId="1076"/>
+          <ac:picMkLst>
+            <pc:docMk/>
+            <pc:sldMk cId="2486051660" sldId="262"/>
+            <ac:picMk id="6" creationId="{859DD66A-C6D6-E52D-533C-1227A36A9BDE}"/>
+          </ac:picMkLst>
+        </pc:picChg>
+      </pc:sldChg>
+      <pc:sldChg chg="addSp modSp new">
+        <pc:chgData name="Michel, Trevor A" userId="S::xu6189ne@go.minnstate.edu::47b47093-98c3-464d-b84b-139362f373ea" providerId="AD" clId="Web-{716F47B6-388F-B64A-3513-975C7EA96578}" dt="2026-02-28T21:36:09.526" v="568" actId="1076"/>
+        <pc:sldMkLst>
+          <pc:docMk/>
+          <pc:sldMk cId="2205884802" sldId="267"/>
+        </pc:sldMkLst>
+        <pc:spChg chg="add mod">
+          <ac:chgData name="Michel, Trevor A" userId="S::xu6189ne@go.minnstate.edu::47b47093-98c3-464d-b84b-139362f373ea" providerId="AD" clId="Web-{716F47B6-388F-B64A-3513-975C7EA96578}" dt="2026-02-28T21:29:30.961" v="493" actId="20577"/>
+          <ac:spMkLst>
+            <pc:docMk/>
+            <pc:sldMk cId="2205884802" sldId="267"/>
+            <ac:spMk id="3" creationId="{E7150560-FDEA-AEE0-D169-4B641397D91E}"/>
+          </ac:spMkLst>
+        </pc:spChg>
+        <pc:spChg chg="add mod">
+          <ac:chgData name="Michel, Trevor A" userId="S::xu6189ne@go.minnstate.edu::47b47093-98c3-464d-b84b-139362f373ea" providerId="AD" clId="Web-{716F47B6-388F-B64A-3513-975C7EA96578}" dt="2026-02-28T21:28:25.352" v="481" actId="20577"/>
+          <ac:spMkLst>
+            <pc:docMk/>
+            <pc:sldMk cId="2205884802" sldId="267"/>
+            <ac:spMk id="4" creationId="{8B9EB567-D992-BD9D-8CD2-9017590843E9}"/>
+          </ac:spMkLst>
+        </pc:spChg>
+        <pc:spChg chg="add mod">
+          <ac:chgData name="Michel, Trevor A" userId="S::xu6189ne@go.minnstate.edu::47b47093-98c3-464d-b84b-139362f373ea" providerId="AD" clId="Web-{716F47B6-388F-B64A-3513-975C7EA96578}" dt="2026-02-28T21:29:58.461" v="500" actId="20577"/>
+          <ac:spMkLst>
+            <pc:docMk/>
+            <pc:sldMk cId="2205884802" sldId="267"/>
+            <ac:spMk id="5" creationId="{7534969B-3141-808D-3E6D-E9A20B5664C8}"/>
+          </ac:spMkLst>
+        </pc:spChg>
+        <pc:spChg chg="add mod">
+          <ac:chgData name="Michel, Trevor A" userId="S::xu6189ne@go.minnstate.edu::47b47093-98c3-464d-b84b-139362f373ea" providerId="AD" clId="Web-{716F47B6-388F-B64A-3513-975C7EA96578}" dt="2026-02-28T21:35:53.806" v="566" actId="1076"/>
+          <ac:spMkLst>
+            <pc:docMk/>
+            <pc:sldMk cId="2205884802" sldId="267"/>
+            <ac:spMk id="6" creationId="{B54B4B66-D7E9-1406-64DC-50F3227259FC}"/>
+          </ac:spMkLst>
+        </pc:spChg>
+        <pc:spChg chg="add mod">
+          <ac:chgData name="Michel, Trevor A" userId="S::xu6189ne@go.minnstate.edu::47b47093-98c3-464d-b84b-139362f373ea" providerId="AD" clId="Web-{716F47B6-388F-B64A-3513-975C7EA96578}" dt="2026-02-28T21:35:46.603" v="565" actId="1076"/>
+          <ac:spMkLst>
+            <pc:docMk/>
+            <pc:sldMk cId="2205884802" sldId="267"/>
+            <ac:spMk id="11" creationId="{0A4DB268-94E1-321F-7F37-D2B02B0B3A10}"/>
+          </ac:spMkLst>
+        </pc:spChg>
+        <pc:spChg chg="add mod">
+          <ac:chgData name="Michel, Trevor A" userId="S::xu6189ne@go.minnstate.edu::47b47093-98c3-464d-b84b-139362f373ea" providerId="AD" clId="Web-{716F47B6-388F-B64A-3513-975C7EA96578}" dt="2026-02-28T21:34:55.976" v="551" actId="20577"/>
+          <ac:spMkLst>
+            <pc:docMk/>
+            <pc:sldMk cId="2205884802" sldId="267"/>
+            <ac:spMk id="12" creationId="{8A102F68-4986-590E-FAA2-E13756DC2435}"/>
+          </ac:spMkLst>
+        </pc:spChg>
+        <pc:spChg chg="add mod">
+          <ac:chgData name="Michel, Trevor A" userId="S::xu6189ne@go.minnstate.edu::47b47093-98c3-464d-b84b-139362f373ea" providerId="AD" clId="Web-{716F47B6-388F-B64A-3513-975C7EA96578}" dt="2026-02-28T21:36:09.526" v="568" actId="1076"/>
+          <ac:spMkLst>
+            <pc:docMk/>
+            <pc:sldMk cId="2205884802" sldId="267"/>
+            <ac:spMk id="13" creationId="{3BBBB0B8-F420-0747-BAF1-759BE9E8C525}"/>
+          </ac:spMkLst>
+        </pc:spChg>
+        <pc:picChg chg="add mod">
+          <ac:chgData name="Michel, Trevor A" userId="S::xu6189ne@go.minnstate.edu::47b47093-98c3-464d-b84b-139362f373ea" providerId="AD" clId="Web-{716F47B6-388F-B64A-3513-975C7EA96578}" dt="2026-02-28T21:33:52.007" v="541" actId="14100"/>
+          <ac:picMkLst>
+            <pc:docMk/>
+            <pc:sldMk cId="2205884802" sldId="267"/>
+            <ac:picMk id="7" creationId="{CCCAA4EF-BD1D-B52A-E9A8-803C1F186889}"/>
+          </ac:picMkLst>
+        </pc:picChg>
+        <pc:picChg chg="add mod ord">
+          <ac:chgData name="Michel, Trevor A" userId="S::xu6189ne@go.minnstate.edu::47b47093-98c3-464d-b84b-139362f373ea" providerId="AD" clId="Web-{716F47B6-388F-B64A-3513-975C7EA96578}" dt="2026-02-28T21:33:06.367" v="529" actId="1076"/>
+          <ac:picMkLst>
+            <pc:docMk/>
+            <pc:sldMk cId="2205884802" sldId="267"/>
+            <ac:picMk id="8" creationId="{D31AFAEA-A4E2-59D9-9F0F-EE2D06D20B58}"/>
+          </ac:picMkLst>
+        </pc:picChg>
+        <pc:picChg chg="add mod">
+          <ac:chgData name="Michel, Trevor A" userId="S::xu6189ne@go.minnstate.edu::47b47093-98c3-464d-b84b-139362f373ea" providerId="AD" clId="Web-{716F47B6-388F-B64A-3513-975C7EA96578}" dt="2026-02-28T21:32:28.663" v="523" actId="1076"/>
+          <ac:picMkLst>
+            <pc:docMk/>
+            <pc:sldMk cId="2205884802" sldId="267"/>
+            <ac:picMk id="9" creationId="{C862E688-1A27-5763-1885-DECCD5A84481}"/>
+          </ac:picMkLst>
+        </pc:picChg>
+        <pc:picChg chg="add mod">
+          <ac:chgData name="Michel, Trevor A" userId="S::xu6189ne@go.minnstate.edu::47b47093-98c3-464d-b84b-139362f373ea" providerId="AD" clId="Web-{716F47B6-388F-B64A-3513-975C7EA96578}" dt="2026-02-28T21:33:18.085" v="530" actId="14100"/>
+          <ac:picMkLst>
+            <pc:docMk/>
+            <pc:sldMk cId="2205884802" sldId="267"/>
+            <ac:picMk id="10" creationId="{09D05CEB-8EBA-DAF9-0FE5-CBB43E505ECE}"/>
+          </ac:picMkLst>
+        </pc:picChg>
       </pc:sldChg>
     </pc:docChg>
   </pc:docChgLst>
@@ -7208,6 +7954,13 @@
             <a:schemeClr val="lt1"/>
           </a:fontRef>
         </p:style>
+        <p:txBody>
+          <a:bodyPr/>
+          <a:lstStyle/>
+          <a:p>
+            <a:endParaRPr lang="en-US"/>
+          </a:p>
+        </p:txBody>
       </p:sp>
       <p:pic>
         <p:nvPicPr>
@@ -7302,6 +8055,13 @@
             <a:schemeClr val="lt1"/>
           </a:fontRef>
         </p:style>
+        <p:txBody>
+          <a:bodyPr/>
+          <a:lstStyle/>
+          <a:p>
+            <a:endParaRPr lang="en-US"/>
+          </a:p>
+        </p:txBody>
       </p:sp>
       <p:sp>
         <p:nvSpPr>
@@ -7984,18 +8744,18 @@
         <p:spPr>
           <a:xfrm>
             <a:off x="448456" y="1710496"/>
-            <a:ext cx="5919503" cy="4470821"/>
+            <a:ext cx="4060558" cy="4144250"/>
           </a:xfrm>
           <a:prstGeom prst="rect">
             <a:avLst/>
           </a:prstGeom>
         </p:spPr>
         <p:txBody>
-          <a:bodyPr rot="0" spcFirstLastPara="0" vertOverflow="overflow" horzOverflow="overflow" vert="horz" lIns="91440" tIns="45720" rIns="91440" bIns="45720" numCol="1" spcCol="0" rtlCol="0" fromWordArt="0" anchorCtr="0" forceAA="0" compatLnSpc="1">
+          <a:bodyPr rot="0" spcFirstLastPara="0" vertOverflow="overflow" horzOverflow="overflow" vert="horz" lIns="91440" tIns="45720" rIns="91440" bIns="45720" numCol="1" spcCol="0" rtlCol="0" fromWordArt="0" anchor="t" anchorCtr="0" forceAA="0" compatLnSpc="1">
             <a:prstTxWarp prst="textNoShape">
               <a:avLst/>
             </a:prstTxWarp>
-            <a:normAutofit/>
+            <a:normAutofit lnSpcReduction="10000"/>
           </a:bodyPr>
           <a:lstStyle/>
           <a:p>
@@ -8012,10 +8772,10 @@
               <a:buSzPct val="80000"/>
             </a:pPr>
             <a:r>
-              <a:rPr lang="en-US" sz="3200">
-                <a:latin typeface="Times New Roman"/>
+              <a:rPr lang="en-US" sz="4400">
+                <a:latin typeface="Arial"/>
                 <a:ea typeface="+mj-ea"/>
-                <a:cs typeface="Times New Roman"/>
+                <a:cs typeface="Arial"/>
               </a:rPr>
               <a:t>Hackathon 2026 </a:t>
             </a:r>
@@ -8035,10 +8795,28 @@
               <a:buFont typeface="Wingdings 3" charset="2"/>
               <a:buChar char=""/>
             </a:pPr>
-            <a:endParaRPr lang="en-US">
-              <a:latin typeface="Times New Roman"/>
+            <a:endParaRPr lang="en-US" sz="2400">
+              <a:latin typeface="Arial"/>
               <a:ea typeface="+mj-ea"/>
-              <a:cs typeface="Times New Roman"/>
+              <a:cs typeface="Arial"/>
+            </a:endParaRPr>
+          </a:p>
+          <a:p>
+            <a:pPr defTabSz="457200">
+              <a:spcBef>
+                <a:spcPts val="1000"/>
+              </a:spcBef>
+              <a:buClr>
+                <a:srgbClr val="F7F7F7"/>
+              </a:buClr>
+              <a:buSzPct val="80000"/>
+              <a:buFont typeface="Wingdings 3" charset="2"/>
+              <a:buChar char=""/>
+            </a:pPr>
+            <a:endParaRPr lang="en-US" sz="2400">
+              <a:latin typeface="Arial"/>
+              <a:ea typeface="+mj-ea"/>
+              <a:cs typeface="Arial"/>
             </a:endParaRPr>
           </a:p>
           <a:p>
@@ -8057,20 +8835,12 @@
               <a:buChar char=""/>
             </a:pPr>
             <a:r>
-              <a:rPr lang="en-US" err="1">
-                <a:latin typeface="Times New Roman"/>
+              <a:rPr lang="en-US" sz="2400">
+                <a:latin typeface="Arial"/>
                 <a:ea typeface="+mj-ea"/>
-                <a:cs typeface="Times New Roman"/>
+                <a:cs typeface="Arial"/>
               </a:rPr>
-              <a:t>Pronob</a:t>
-            </a:r>
-            <a:r>
-              <a:rPr lang="en-US">
-                <a:latin typeface="Times New Roman"/>
-                <a:ea typeface="+mj-ea"/>
-                <a:cs typeface="Times New Roman"/>
-              </a:rPr>
-              <a:t> Kumar </a:t>
+              <a:t>Pronob Kumar </a:t>
             </a:r>
           </a:p>
           <a:p>
@@ -8089,10 +8859,10 @@
               <a:buChar char=""/>
             </a:pPr>
             <a:r>
-              <a:rPr lang="en-US">
-                <a:latin typeface="Times New Roman"/>
+              <a:rPr lang="en-US" sz="2400">
+                <a:latin typeface="Arial"/>
                 <a:ea typeface="+mj-ea"/>
-                <a:cs typeface="Times New Roman"/>
+                <a:cs typeface="Arial"/>
               </a:rPr>
               <a:t>Trevor Michel </a:t>
             </a:r>
@@ -8113,10 +8883,10 @@
               <a:buChar char=""/>
             </a:pPr>
             <a:r>
-              <a:rPr lang="en-US">
-                <a:latin typeface="Times New Roman"/>
+              <a:rPr lang="en-US" sz="2400">
+                <a:latin typeface="Arial"/>
                 <a:ea typeface="+mj-ea"/>
-                <a:cs typeface="Times New Roman"/>
+                <a:cs typeface="Arial"/>
               </a:rPr>
               <a:t>Walter Weber </a:t>
             </a:r>
@@ -8137,10 +8907,10 @@
               <a:buChar char=""/>
             </a:pPr>
             <a:r>
-              <a:rPr lang="en-US">
-                <a:latin typeface="Times New Roman"/>
+              <a:rPr lang="en-US" sz="2400">
+                <a:latin typeface="Arial"/>
                 <a:ea typeface="+mj-ea"/>
-                <a:cs typeface="Times New Roman"/>
+                <a:cs typeface="Arial"/>
               </a:rPr>
               <a:t>Ian McKinzie</a:t>
             </a:r>
@@ -8183,6 +8953,46 @@
           </a:p>
         </p:txBody>
       </p:sp>
+      <p:sp>
+        <p:nvSpPr>
+          <p:cNvPr id="2" name="TextBox 1">
+            <a:extLst>
+              <a:ext uri="{FF2B5EF4-FFF2-40B4-BE49-F238E27FC236}">
+                <a16:creationId xmlns:a16="http://schemas.microsoft.com/office/drawing/2014/main" id="{46F82388-511D-B6FA-A49F-D5DABD44F454}"/>
+              </a:ext>
+            </a:extLst>
+          </p:cNvPr>
+          <p:cNvSpPr txBox="1"/>
+          <p:nvPr/>
+        </p:nvSpPr>
+        <p:spPr>
+          <a:xfrm>
+            <a:off x="4163785" y="1133928"/>
+            <a:ext cx="7720482" cy="4708981"/>
+          </a:xfrm>
+          <a:prstGeom prst="rect">
+            <a:avLst/>
+          </a:prstGeom>
+          <a:noFill/>
+        </p:spPr>
+        <p:txBody>
+          <a:bodyPr rot="0" spcFirstLastPara="0" vertOverflow="overflow" horzOverflow="overflow" vert="horz" wrap="square" lIns="91440" tIns="45720" rIns="91440" bIns="45720" numCol="1" spcCol="0" rtlCol="0" fromWordArt="0" anchor="t" anchorCtr="0" forceAA="0" compatLnSpc="1">
+            <a:prstTxWarp prst="textNoShape">
+              <a:avLst/>
+            </a:prstTxWarp>
+            <a:spAutoFit/>
+          </a:bodyPr>
+          <a:lstStyle/>
+          <a:p>
+            <a:r>
+              <a:rPr lang="en-US" sz="6000" b="1">
+                <a:latin typeface="Rockwell"/>
+              </a:rPr>
+              <a:t>Exploring Machine Learning Models and Data Poisoning to solve real-life issues with AI </a:t>
+            </a:r>
+          </a:p>
+        </p:txBody>
+      </p:sp>
     </p:spTree>
     <p:extLst>
       <p:ext uri="{BB962C8B-B14F-4D97-AF65-F5344CB8AC3E}">
@@ -8192,6 +9002,602 @@
   </p:cSld>
   <p:clrMapOvr>
     <a:overrideClrMapping bg1="lt1" tx1="dk1" bg2="lt2" tx2="dk2" accent1="accent1" accent2="accent2" accent3="accent3" accent4="accent4" accent5="accent5" accent6="accent6" hlink="hlink" folHlink="folHlink"/>
+  </p:clrMapOvr>
+</p:sld>
+</file>
+
+<file path=ppt/slides/slide10.xml><?xml version="1.0" encoding="utf-8"?>
+<p:sld xmlns:a="http://schemas.openxmlformats.org/drawingml/2006/main" xmlns:r="http://schemas.openxmlformats.org/officeDocument/2006/relationships" xmlns:p="http://schemas.openxmlformats.org/presentationml/2006/main">
+  <p:cSld>
+    <p:spTree>
+      <p:nvGrpSpPr>
+        <p:cNvPr id="1" name="">
+          <a:extLst>
+            <a:ext uri="{FF2B5EF4-FFF2-40B4-BE49-F238E27FC236}">
+              <a16:creationId xmlns:a16="http://schemas.microsoft.com/office/drawing/2014/main" id="{7DB50174-8227-54B0-4BB1-E8B31F34952A}"/>
+            </a:ext>
+          </a:extLst>
+        </p:cNvPr>
+        <p:cNvGrpSpPr/>
+        <p:nvPr/>
+      </p:nvGrpSpPr>
+      <p:grpSpPr>
+        <a:xfrm>
+          <a:off x="0" y="0"/>
+          <a:ext cx="0" cy="0"/>
+          <a:chOff x="0" y="0"/>
+          <a:chExt cx="0" cy="0"/>
+        </a:xfrm>
+      </p:grpSpPr>
+      <p:sp>
+        <p:nvSpPr>
+          <p:cNvPr id="3" name="TextBox 2">
+            <a:extLst>
+              <a:ext uri="{FF2B5EF4-FFF2-40B4-BE49-F238E27FC236}">
+                <a16:creationId xmlns:a16="http://schemas.microsoft.com/office/drawing/2014/main" id="{4B5922F2-ACFA-BCF1-5823-1817A87A997E}"/>
+              </a:ext>
+            </a:extLst>
+          </p:cNvPr>
+          <p:cNvSpPr txBox="1"/>
+          <p:nvPr/>
+        </p:nvSpPr>
+        <p:spPr>
+          <a:xfrm>
+            <a:off x="1777464" y="242736"/>
+            <a:ext cx="8290560" cy="800219"/>
+          </a:xfrm>
+          <a:prstGeom prst="rect">
+            <a:avLst/>
+          </a:prstGeom>
+          <a:noFill/>
+        </p:spPr>
+        <p:txBody>
+          <a:bodyPr rot="0" spcFirstLastPara="0" vertOverflow="overflow" horzOverflow="overflow" vert="horz" wrap="square" lIns="91440" tIns="45720" rIns="91440" bIns="45720" numCol="1" spcCol="0" rtlCol="0" fromWordArt="0" anchor="t" anchorCtr="0" forceAA="0" compatLnSpc="1">
+            <a:prstTxWarp prst="textNoShape">
+              <a:avLst/>
+            </a:prstTxWarp>
+            <a:spAutoFit/>
+          </a:bodyPr>
+          <a:lstStyle/>
+          <a:p>
+            <a:pPr algn="ctr"/>
+            <a:r>
+              <a:rPr lang="en-US" sz="2800">
+                <a:solidFill>
+                  <a:srgbClr val="FFFFFF"/>
+                </a:solidFill>
+                <a:latin typeface="Arial"/>
+                <a:cs typeface="Arial"/>
+              </a:rPr>
+              <a:t>Confusion Matrix</a:t>
+            </a:r>
+            <a:endParaRPr lang="en-US" sz="2800">
+              <a:latin typeface="Arial" panose="020B0604020202020204" pitchFamily="34" charset="0"/>
+              <a:cs typeface="Arial" panose="020B0604020202020204" pitchFamily="34" charset="0"/>
+            </a:endParaRPr>
+          </a:p>
+          <a:p>
+            <a:pPr algn="ctr"/>
+            <a:endParaRPr lang="en-US"/>
+          </a:p>
+        </p:txBody>
+      </p:sp>
+      <p:pic>
+        <p:nvPicPr>
+          <p:cNvPr id="4" name="Picture 3">
+            <a:extLst>
+              <a:ext uri="{FF2B5EF4-FFF2-40B4-BE49-F238E27FC236}">
+                <a16:creationId xmlns:a16="http://schemas.microsoft.com/office/drawing/2014/main" id="{1B99EF25-685E-8AA2-586E-2B1C9D5F5803}"/>
+              </a:ext>
+            </a:extLst>
+          </p:cNvPr>
+          <p:cNvPicPr>
+            <a:picLocks noChangeAspect="1"/>
+          </p:cNvPicPr>
+          <p:nvPr/>
+        </p:nvPicPr>
+        <p:blipFill>
+          <a:blip r:embed="rId2"/>
+          <a:stretch>
+            <a:fillRect/>
+          </a:stretch>
+        </p:blipFill>
+        <p:spPr>
+          <a:xfrm>
+            <a:off x="326806" y="923794"/>
+            <a:ext cx="11191875" cy="4667250"/>
+          </a:xfrm>
+          <a:prstGeom prst="rect">
+            <a:avLst/>
+          </a:prstGeom>
+        </p:spPr>
+      </p:pic>
+      <p:sp>
+        <p:nvSpPr>
+          <p:cNvPr id="5" name="TextBox 4">
+            <a:extLst>
+              <a:ext uri="{FF2B5EF4-FFF2-40B4-BE49-F238E27FC236}">
+                <a16:creationId xmlns:a16="http://schemas.microsoft.com/office/drawing/2014/main" id="{3BD2FD1A-4DC7-C4CD-4AD5-91D1D2CE691B}"/>
+              </a:ext>
+            </a:extLst>
+          </p:cNvPr>
+          <p:cNvSpPr txBox="1"/>
+          <p:nvPr/>
+        </p:nvSpPr>
+        <p:spPr>
+          <a:xfrm>
+            <a:off x="500063" y="5810437"/>
+            <a:ext cx="11191874" cy="369332"/>
+          </a:xfrm>
+          <a:prstGeom prst="rect">
+            <a:avLst/>
+          </a:prstGeom>
+          <a:noFill/>
+        </p:spPr>
+        <p:txBody>
+          <a:bodyPr wrap="square" lIns="91440" tIns="45720" rIns="91440" bIns="45720" rtlCol="0" anchor="t">
+            <a:spAutoFit/>
+          </a:bodyPr>
+          <a:lstStyle/>
+          <a:p>
+            <a:r>
+              <a:rPr lang="en-US">
+                <a:latin typeface="Arial"/>
+                <a:cs typeface="Arial"/>
+              </a:rPr>
+              <a:t>We have more actual positives negatives than false positives and negatives.   </a:t>
+            </a:r>
+          </a:p>
+        </p:txBody>
+      </p:sp>
+    </p:spTree>
+    <p:extLst>
+      <p:ext uri="{BB962C8B-B14F-4D97-AF65-F5344CB8AC3E}">
+        <p14:creationId xmlns:p14="http://schemas.microsoft.com/office/powerpoint/2010/main" val="3738759402"/>
+      </p:ext>
+    </p:extLst>
+  </p:cSld>
+  <p:clrMapOvr>
+    <a:masterClrMapping/>
+  </p:clrMapOvr>
+</p:sld>
+</file>
+
+<file path=ppt/slides/slide11.xml><?xml version="1.0" encoding="utf-8"?>
+<p:sld xmlns:a="http://schemas.openxmlformats.org/drawingml/2006/main" xmlns:r="http://schemas.openxmlformats.org/officeDocument/2006/relationships" xmlns:p="http://schemas.openxmlformats.org/presentationml/2006/main">
+  <p:cSld>
+    <p:spTree>
+      <p:nvGrpSpPr>
+        <p:cNvPr id="1" name="">
+          <a:extLst>
+            <a:ext uri="{FF2B5EF4-FFF2-40B4-BE49-F238E27FC236}">
+              <a16:creationId xmlns:a16="http://schemas.microsoft.com/office/drawing/2014/main" id="{4F274DA7-86FA-9FB8-3665-7841D4F7F979}"/>
+            </a:ext>
+          </a:extLst>
+        </p:cNvPr>
+        <p:cNvGrpSpPr/>
+        <p:nvPr/>
+      </p:nvGrpSpPr>
+      <p:grpSpPr>
+        <a:xfrm>
+          <a:off x="0" y="0"/>
+          <a:ext cx="0" cy="0"/>
+          <a:chOff x="0" y="0"/>
+          <a:chExt cx="0" cy="0"/>
+        </a:xfrm>
+      </p:grpSpPr>
+      <p:sp>
+        <p:nvSpPr>
+          <p:cNvPr id="3" name="TextBox 2">
+            <a:extLst>
+              <a:ext uri="{FF2B5EF4-FFF2-40B4-BE49-F238E27FC236}">
+                <a16:creationId xmlns:a16="http://schemas.microsoft.com/office/drawing/2014/main" id="{CE16AF6D-396B-01FA-E3F5-3FC66F1A09D9}"/>
+              </a:ext>
+            </a:extLst>
+          </p:cNvPr>
+          <p:cNvSpPr txBox="1"/>
+          <p:nvPr/>
+        </p:nvSpPr>
+        <p:spPr>
+          <a:xfrm>
+            <a:off x="1950720" y="330200"/>
+            <a:ext cx="8290560" cy="861774"/>
+          </a:xfrm>
+          <a:prstGeom prst="rect">
+            <a:avLst/>
+          </a:prstGeom>
+          <a:noFill/>
+        </p:spPr>
+        <p:txBody>
+          <a:bodyPr rot="0" spcFirstLastPara="0" vertOverflow="overflow" horzOverflow="overflow" vert="horz" wrap="square" lIns="91440" tIns="45720" rIns="91440" bIns="45720" numCol="1" spcCol="0" rtlCol="0" fromWordArt="0" anchor="t" anchorCtr="0" forceAA="0" compatLnSpc="1">
+            <a:prstTxWarp prst="textNoShape">
+              <a:avLst/>
+            </a:prstTxWarp>
+            <a:spAutoFit/>
+          </a:bodyPr>
+          <a:lstStyle/>
+          <a:p>
+            <a:pPr algn="ctr"/>
+            <a:r>
+              <a:rPr lang="en-US" sz="3200">
+                <a:solidFill>
+                  <a:srgbClr val="FFFFFF"/>
+                </a:solidFill>
+                <a:latin typeface="Arial" panose="020B0604020202020204" pitchFamily="34" charset="0"/>
+                <a:cs typeface="Arial" panose="020B0604020202020204" pitchFamily="34" charset="0"/>
+              </a:rPr>
+              <a:t>Most important features </a:t>
+            </a:r>
+            <a:endParaRPr lang="en-US" sz="3200">
+              <a:latin typeface="Arial" panose="020B0604020202020204" pitchFamily="34" charset="0"/>
+              <a:cs typeface="Arial" panose="020B0604020202020204" pitchFamily="34" charset="0"/>
+            </a:endParaRPr>
+          </a:p>
+          <a:p>
+            <a:pPr algn="ctr"/>
+            <a:endParaRPr lang="en-US"/>
+          </a:p>
+        </p:txBody>
+      </p:sp>
+      <p:pic>
+        <p:nvPicPr>
+          <p:cNvPr id="10" name="Picture 9">
+            <a:extLst>
+              <a:ext uri="{FF2B5EF4-FFF2-40B4-BE49-F238E27FC236}">
+                <a16:creationId xmlns:a16="http://schemas.microsoft.com/office/drawing/2014/main" id="{E30BCDFB-8374-4D0A-6FB7-D4CF24FCB854}"/>
+              </a:ext>
+            </a:extLst>
+          </p:cNvPr>
+          <p:cNvPicPr>
+            <a:picLocks noChangeAspect="1"/>
+          </p:cNvPicPr>
+          <p:nvPr/>
+        </p:nvPicPr>
+        <p:blipFill>
+          <a:blip r:embed="rId2"/>
+          <a:stretch>
+            <a:fillRect/>
+          </a:stretch>
+        </p:blipFill>
+        <p:spPr>
+          <a:xfrm>
+            <a:off x="148691" y="1191974"/>
+            <a:ext cx="6897002" cy="5150926"/>
+          </a:xfrm>
+          <a:prstGeom prst="rect">
+            <a:avLst/>
+          </a:prstGeom>
+        </p:spPr>
+      </p:pic>
+      <p:sp>
+        <p:nvSpPr>
+          <p:cNvPr id="11" name="TextBox 10">
+            <a:extLst>
+              <a:ext uri="{FF2B5EF4-FFF2-40B4-BE49-F238E27FC236}">
+                <a16:creationId xmlns:a16="http://schemas.microsoft.com/office/drawing/2014/main" id="{F72C558E-5FC3-BD5C-A25E-84E3F0E91338}"/>
+              </a:ext>
+            </a:extLst>
+          </p:cNvPr>
+          <p:cNvSpPr txBox="1"/>
+          <p:nvPr/>
+        </p:nvSpPr>
+        <p:spPr>
+          <a:xfrm>
+            <a:off x="7403501" y="1442953"/>
+            <a:ext cx="4078182" cy="3970318"/>
+          </a:xfrm>
+          <a:prstGeom prst="rect">
+            <a:avLst/>
+          </a:prstGeom>
+          <a:noFill/>
+        </p:spPr>
+        <p:txBody>
+          <a:bodyPr wrap="square" rtlCol="0">
+            <a:spAutoFit/>
+          </a:bodyPr>
+          <a:lstStyle/>
+          <a:p>
+            <a:r>
+              <a:rPr lang="en-US" sz="3600">
+                <a:latin typeface="Arial" panose="020B0604020202020204" pitchFamily="34" charset="0"/>
+                <a:cs typeface="Arial" panose="020B0604020202020204" pitchFamily="34" charset="0"/>
+              </a:rPr>
+              <a:t>Anova Model: </a:t>
+            </a:r>
+            <a:br>
+              <a:rPr lang="en-US" sz="3600">
+                <a:latin typeface="Arial" panose="020B0604020202020204" pitchFamily="34" charset="0"/>
+                <a:cs typeface="Arial" panose="020B0604020202020204" pitchFamily="34" charset="0"/>
+              </a:rPr>
+            </a:br>
+            <a:r>
+              <a:rPr lang="en-US" sz="3600">
+                <a:latin typeface="Arial" panose="020B0604020202020204" pitchFamily="34" charset="0"/>
+                <a:cs typeface="Arial" panose="020B0604020202020204" pitchFamily="34" charset="0"/>
+              </a:rPr>
+              <a:t>logit(p) = -0.3161 + (1.2171 * Thallium) + (1.0663 * Chest pain type) + (0.7445 * Exercise angina) </a:t>
+            </a:r>
+          </a:p>
+        </p:txBody>
+      </p:sp>
+    </p:spTree>
+    <p:extLst>
+      <p:ext uri="{BB962C8B-B14F-4D97-AF65-F5344CB8AC3E}">
+        <p14:creationId xmlns:p14="http://schemas.microsoft.com/office/powerpoint/2010/main" val="1561312112"/>
+      </p:ext>
+    </p:extLst>
+  </p:cSld>
+  <p:clrMapOvr>
+    <a:masterClrMapping/>
+  </p:clrMapOvr>
+</p:sld>
+</file>
+
+<file path=ppt/slides/slide12.xml><?xml version="1.0" encoding="utf-8"?>
+<p:sld xmlns:a="http://schemas.openxmlformats.org/drawingml/2006/main" xmlns:r="http://schemas.openxmlformats.org/officeDocument/2006/relationships" xmlns:p="http://schemas.openxmlformats.org/presentationml/2006/main">
+  <p:cSld>
+    <p:spTree>
+      <p:nvGrpSpPr>
+        <p:cNvPr id="1" name="">
+          <a:extLst>
+            <a:ext uri="{FF2B5EF4-FFF2-40B4-BE49-F238E27FC236}">
+              <a16:creationId xmlns:a16="http://schemas.microsoft.com/office/drawing/2014/main" id="{0DB09D11-1357-59B2-8AFC-6C6AD6745D61}"/>
+            </a:ext>
+          </a:extLst>
+        </p:cNvPr>
+        <p:cNvGrpSpPr/>
+        <p:nvPr/>
+      </p:nvGrpSpPr>
+      <p:grpSpPr>
+        <a:xfrm>
+          <a:off x="0" y="0"/>
+          <a:ext cx="0" cy="0"/>
+          <a:chOff x="0" y="0"/>
+          <a:chExt cx="0" cy="0"/>
+        </a:xfrm>
+      </p:grpSpPr>
+      <p:sp>
+        <p:nvSpPr>
+          <p:cNvPr id="2" name="TextBox 1">
+            <a:extLst>
+              <a:ext uri="{FF2B5EF4-FFF2-40B4-BE49-F238E27FC236}">
+                <a16:creationId xmlns:a16="http://schemas.microsoft.com/office/drawing/2014/main" id="{DB77DF34-B729-6151-6209-6FC8E030416D}"/>
+              </a:ext>
+            </a:extLst>
+          </p:cNvPr>
+          <p:cNvSpPr txBox="1"/>
+          <p:nvPr/>
+        </p:nvSpPr>
+        <p:spPr>
+          <a:xfrm>
+            <a:off x="2711394" y="190830"/>
+            <a:ext cx="6058895" cy="584775"/>
+          </a:xfrm>
+          <a:prstGeom prst="rect">
+            <a:avLst/>
+          </a:prstGeom>
+          <a:noFill/>
+        </p:spPr>
+        <p:txBody>
+          <a:bodyPr wrap="square" lIns="91440" tIns="45720" rIns="91440" bIns="45720" rtlCol="0" anchor="t">
+            <a:spAutoFit/>
+          </a:bodyPr>
+          <a:lstStyle/>
+          <a:p>
+            <a:pPr algn="ctr"/>
+            <a:r>
+              <a:rPr lang="en-US" sz="3200">
+                <a:latin typeface="Arial"/>
+                <a:cs typeface="Arial"/>
+              </a:rPr>
+              <a:t>App for the Predicting</a:t>
+            </a:r>
+          </a:p>
+        </p:txBody>
+      </p:sp>
+      <p:pic>
+        <p:nvPicPr>
+          <p:cNvPr id="4" name="Picture 3">
+            <a:extLst>
+              <a:ext uri="{FF2B5EF4-FFF2-40B4-BE49-F238E27FC236}">
+                <a16:creationId xmlns:a16="http://schemas.microsoft.com/office/drawing/2014/main" id="{6DA6647C-C68B-5001-A8A1-7C36A5B84196}"/>
+              </a:ext>
+            </a:extLst>
+          </p:cNvPr>
+          <p:cNvPicPr>
+            <a:picLocks noChangeAspect="1"/>
+          </p:cNvPicPr>
+          <p:nvPr/>
+        </p:nvPicPr>
+        <p:blipFill>
+          <a:blip r:embed="rId2"/>
+          <a:stretch>
+            <a:fillRect/>
+          </a:stretch>
+        </p:blipFill>
+        <p:spPr>
+          <a:xfrm>
+            <a:off x="1491459" y="992924"/>
+            <a:ext cx="8797530" cy="5308485"/>
+          </a:xfrm>
+          <a:prstGeom prst="rect">
+            <a:avLst/>
+          </a:prstGeom>
+        </p:spPr>
+      </p:pic>
+    </p:spTree>
+    <p:extLst>
+      <p:ext uri="{BB962C8B-B14F-4D97-AF65-F5344CB8AC3E}">
+        <p14:creationId xmlns:p14="http://schemas.microsoft.com/office/powerpoint/2010/main" val="1615472381"/>
+      </p:ext>
+    </p:extLst>
+  </p:cSld>
+  <p:clrMapOvr>
+    <a:masterClrMapping/>
+  </p:clrMapOvr>
+</p:sld>
+</file>
+
+<file path=ppt/slides/slide13.xml><?xml version="1.0" encoding="utf-8"?>
+<p:sld xmlns:a="http://schemas.openxmlformats.org/drawingml/2006/main" xmlns:r="http://schemas.openxmlformats.org/officeDocument/2006/relationships" xmlns:p="http://schemas.openxmlformats.org/presentationml/2006/main">
+  <p:cSld>
+    <p:spTree>
+      <p:nvGrpSpPr>
+        <p:cNvPr id="1" name="">
+          <a:extLst>
+            <a:ext uri="{FF2B5EF4-FFF2-40B4-BE49-F238E27FC236}">
+              <a16:creationId xmlns:a16="http://schemas.microsoft.com/office/drawing/2014/main" id="{DA1A7ED0-E642-EB81-DF2E-A9ECE6B35C25}"/>
+            </a:ext>
+          </a:extLst>
+        </p:cNvPr>
+        <p:cNvGrpSpPr/>
+        <p:nvPr/>
+      </p:nvGrpSpPr>
+      <p:grpSpPr>
+        <a:xfrm>
+          <a:off x="0" y="0"/>
+          <a:ext cx="0" cy="0"/>
+          <a:chOff x="0" y="0"/>
+          <a:chExt cx="0" cy="0"/>
+        </a:xfrm>
+      </p:grpSpPr>
+      <p:sp>
+        <p:nvSpPr>
+          <p:cNvPr id="2" name="TextBox 1">
+            <a:extLst>
+              <a:ext uri="{FF2B5EF4-FFF2-40B4-BE49-F238E27FC236}">
+                <a16:creationId xmlns:a16="http://schemas.microsoft.com/office/drawing/2014/main" id="{903F5F9F-65DC-CA06-58F9-CADC08124898}"/>
+              </a:ext>
+            </a:extLst>
+          </p:cNvPr>
+          <p:cNvSpPr txBox="1"/>
+          <p:nvPr/>
+        </p:nvSpPr>
+        <p:spPr>
+          <a:xfrm>
+            <a:off x="651899" y="2403585"/>
+            <a:ext cx="10866639" cy="1323439"/>
+          </a:xfrm>
+          <a:prstGeom prst="rect">
+            <a:avLst/>
+          </a:prstGeom>
+          <a:noFill/>
+        </p:spPr>
+        <p:txBody>
+          <a:bodyPr wrap="square" lIns="91440" tIns="45720" rIns="91440" bIns="45720" rtlCol="0" anchor="t">
+            <a:spAutoFit/>
+          </a:bodyPr>
+          <a:lstStyle/>
+          <a:p>
+            <a:pPr algn="ctr"/>
+            <a:r>
+              <a:rPr lang="en-US" sz="8000">
+                <a:latin typeface="Arial"/>
+                <a:cs typeface="Arial"/>
+              </a:rPr>
+              <a:t>Questions</a:t>
+            </a:r>
+          </a:p>
+        </p:txBody>
+      </p:sp>
+      <p:sp>
+        <p:nvSpPr>
+          <p:cNvPr id="3" name="TextBox 2">
+            <a:extLst>
+              <a:ext uri="{FF2B5EF4-FFF2-40B4-BE49-F238E27FC236}">
+                <a16:creationId xmlns:a16="http://schemas.microsoft.com/office/drawing/2014/main" id="{87CAFC03-C6C7-98AA-21A0-CA224D98C899}"/>
+              </a:ext>
+            </a:extLst>
+          </p:cNvPr>
+          <p:cNvSpPr txBox="1"/>
+          <p:nvPr/>
+        </p:nvSpPr>
+        <p:spPr>
+          <a:xfrm>
+            <a:off x="353785" y="689428"/>
+            <a:ext cx="4726214" cy="584775"/>
+          </a:xfrm>
+          <a:prstGeom prst="rect">
+            <a:avLst/>
+          </a:prstGeom>
+          <a:noFill/>
+        </p:spPr>
+        <p:txBody>
+          <a:bodyPr rot="0" spcFirstLastPara="0" vertOverflow="overflow" horzOverflow="overflow" vert="horz" wrap="square" lIns="91440" tIns="45720" rIns="91440" bIns="45720" numCol="1" spcCol="0" rtlCol="0" fromWordArt="0" anchor="t" anchorCtr="0" forceAA="0" compatLnSpc="1">
+            <a:prstTxWarp prst="textNoShape">
+              <a:avLst/>
+            </a:prstTxWarp>
+            <a:spAutoFit/>
+          </a:bodyPr>
+          <a:lstStyle/>
+          <a:p>
+            <a:r>
+              <a:rPr lang="en-US" sz="3200">
+                <a:latin typeface="Arial"/>
+                <a:cs typeface="Arial"/>
+              </a:rPr>
+              <a:t>Thank you for listening</a:t>
+            </a:r>
+          </a:p>
+        </p:txBody>
+      </p:sp>
+      <p:sp>
+        <p:nvSpPr>
+          <p:cNvPr id="4" name="TextBox 3">
+            <a:extLst>
+              <a:ext uri="{FF2B5EF4-FFF2-40B4-BE49-F238E27FC236}">
+                <a16:creationId xmlns:a16="http://schemas.microsoft.com/office/drawing/2014/main" id="{2B35870D-C1FD-2537-5F23-9A7B45D1130F}"/>
+              </a:ext>
+            </a:extLst>
+          </p:cNvPr>
+          <p:cNvSpPr txBox="1"/>
+          <p:nvPr/>
+        </p:nvSpPr>
+        <p:spPr>
+          <a:xfrm>
+            <a:off x="707665" y="5140115"/>
+            <a:ext cx="9613127" cy="646331"/>
+          </a:xfrm>
+          <a:prstGeom prst="rect">
+            <a:avLst/>
+          </a:prstGeom>
+          <a:noFill/>
+        </p:spPr>
+        <p:txBody>
+          <a:bodyPr wrap="square" rtlCol="0">
+            <a:spAutoFit/>
+          </a:bodyPr>
+          <a:lstStyle/>
+          <a:p>
+            <a:r>
+              <a:rPr lang="en-US"/>
+              <a:t>GitHub Link: </a:t>
+            </a:r>
+            <a:r>
+              <a:rPr lang="en-US">
+                <a:hlinkClick r:id="rId2"/>
+              </a:rPr>
+              <a:t>https://github.com/dmail5802/hackathon_competition</a:t>
+            </a:r>
+            <a:endParaRPr lang="en-US"/>
+          </a:p>
+          <a:p>
+            <a:r>
+              <a:rPr lang="en-US"/>
+              <a:t>We used Python, JS, HTML, CSS as programming languages.</a:t>
+            </a:r>
+          </a:p>
+        </p:txBody>
+      </p:sp>
+    </p:spTree>
+    <p:extLst>
+      <p:ext uri="{BB962C8B-B14F-4D97-AF65-F5344CB8AC3E}">
+        <p14:creationId xmlns:p14="http://schemas.microsoft.com/office/powerpoint/2010/main" val="2635568907"/>
+      </p:ext>
+    </p:extLst>
+  </p:cSld>
+  <p:clrMapOvr>
+    <a:masterClrMapping/>
   </p:clrMapOvr>
 </p:sld>
 </file>
@@ -8228,7 +9634,7 @@
         <p:spPr>
           <a:xfrm>
             <a:off x="335642" y="308428"/>
-            <a:ext cx="8772071" cy="584775"/>
+            <a:ext cx="8772071" cy="523220"/>
           </a:xfrm>
           <a:prstGeom prst="rect">
             <a:avLst/>
@@ -8245,7 +9651,10 @@
           <a:lstStyle/>
           <a:p>
             <a:r>
-              <a:rPr lang="en-US" sz="3200"/>
+              <a:rPr lang="en-US" sz="2800">
+                <a:latin typeface="Arial"/>
+                <a:cs typeface="Arial"/>
+              </a:rPr>
               <a:t>Dataset: Supreme Court Justices</a:t>
             </a:r>
           </a:p>
@@ -8283,7 +9692,10 @@
           <a:lstStyle/>
           <a:p>
             <a:r>
-              <a:rPr lang="en-US"/>
+              <a:rPr lang="en-US">
+                <a:latin typeface="Arial"/>
+                <a:cs typeface="Arial"/>
+              </a:rPr>
               <a:t>Predicted when alive Supreme Court Justices were going to die using machine learning</a:t>
             </a:r>
           </a:p>
@@ -8321,8 +9733,11 @@
           <a:lstStyle/>
           <a:p>
             <a:r>
-              <a:rPr lang="en-US"/>
-              <a:t>Black bar represents how old each person (in 2021) was compared to how long they are expected to live</a:t>
+              <a:rPr lang="en-US">
+                <a:latin typeface="Arial"/>
+                <a:cs typeface="Arial"/>
+              </a:rPr>
+              <a:t>The black bar represents how old each person (in 2021) was compared to how long they are expected to live</a:t>
             </a:r>
           </a:p>
         </p:txBody>
@@ -8357,6 +9772,47 @@
           </a:prstGeom>
         </p:spPr>
       </p:pic>
+      <p:sp>
+        <p:nvSpPr>
+          <p:cNvPr id="2" name="TextBox 1">
+            <a:extLst>
+              <a:ext uri="{FF2B5EF4-FFF2-40B4-BE49-F238E27FC236}">
+                <a16:creationId xmlns:a16="http://schemas.microsoft.com/office/drawing/2014/main" id="{25CCF194-7100-E8E2-06B4-11C3E3EBC437}"/>
+              </a:ext>
+            </a:extLst>
+          </p:cNvPr>
+          <p:cNvSpPr txBox="1"/>
+          <p:nvPr/>
+        </p:nvSpPr>
+        <p:spPr>
+          <a:xfrm>
+            <a:off x="8064499" y="3256642"/>
+            <a:ext cx="4036785" cy="1200329"/>
+          </a:xfrm>
+          <a:prstGeom prst="rect">
+            <a:avLst/>
+          </a:prstGeom>
+          <a:noFill/>
+        </p:spPr>
+        <p:txBody>
+          <a:bodyPr rot="0" spcFirstLastPara="0" vertOverflow="overflow" horzOverflow="overflow" vert="horz" wrap="square" lIns="91440" tIns="45720" rIns="91440" bIns="45720" numCol="1" spcCol="0" rtlCol="0" fromWordArt="0" anchor="t" anchorCtr="0" forceAA="0" compatLnSpc="1">
+            <a:prstTxWarp prst="textNoShape">
+              <a:avLst/>
+            </a:prstTxWarp>
+            <a:spAutoFit/>
+          </a:bodyPr>
+          <a:lstStyle/>
+          <a:p>
+            <a:r>
+              <a:rPr lang="en-US">
+                <a:latin typeface="Arial"/>
+                <a:cs typeface="Arial"/>
+              </a:rPr>
+              <a:t>Some data elements used to predict age are birth date, term start date, as well as categorical elements such as political party or sex</a:t>
+            </a:r>
+          </a:p>
+        </p:txBody>
+      </p:sp>
     </p:spTree>
     <p:extLst>
       <p:ext uri="{BB962C8B-B14F-4D97-AF65-F5344CB8AC3E}">
@@ -8409,8 +9865,8 @@
         </p:blipFill>
         <p:spPr>
           <a:xfrm>
-            <a:off x="393326" y="1787763"/>
-            <a:ext cx="7765982" cy="4628032"/>
+            <a:off x="393326" y="1715192"/>
+            <a:ext cx="7648055" cy="4555463"/>
           </a:xfrm>
           <a:prstGeom prst="rect">
             <a:avLst/>
@@ -8432,7 +9888,7 @@
         <p:spPr>
           <a:xfrm>
             <a:off x="319911" y="332887"/>
-            <a:ext cx="6954455" cy="584775"/>
+            <a:ext cx="6954455" cy="523220"/>
           </a:xfrm>
           <a:prstGeom prst="rect">
             <a:avLst/>
@@ -8449,7 +9905,10 @@
           <a:lstStyle/>
           <a:p>
             <a:r>
-              <a:rPr lang="en-US" sz="3200"/>
+              <a:rPr lang="en-US" sz="2800">
+                <a:latin typeface="Arial"/>
+                <a:cs typeface="Arial"/>
+              </a:rPr>
               <a:t>Results after data poisoning</a:t>
             </a:r>
           </a:p>
@@ -8487,8 +9946,52 @@
           <a:lstStyle/>
           <a:p>
             <a:r>
-              <a:rPr lang="en-US"/>
+              <a:rPr lang="en-US">
+                <a:latin typeface="Arial"/>
+                <a:cs typeface="Arial"/>
+              </a:rPr>
               <a:t>This model appears to be quite robust to data poisoning</a:t>
+            </a:r>
+          </a:p>
+        </p:txBody>
+      </p:sp>
+      <p:sp>
+        <p:nvSpPr>
+          <p:cNvPr id="5" name="TextBox 4">
+            <a:extLst>
+              <a:ext uri="{FF2B5EF4-FFF2-40B4-BE49-F238E27FC236}">
+                <a16:creationId xmlns:a16="http://schemas.microsoft.com/office/drawing/2014/main" id="{FE78A168-E418-58FB-3B03-F216CE80888D}"/>
+              </a:ext>
+            </a:extLst>
+          </p:cNvPr>
+          <p:cNvSpPr txBox="1"/>
+          <p:nvPr/>
+        </p:nvSpPr>
+        <p:spPr>
+          <a:xfrm>
+            <a:off x="8109857" y="1650999"/>
+            <a:ext cx="2743199" cy="1200329"/>
+          </a:xfrm>
+          <a:prstGeom prst="rect">
+            <a:avLst/>
+          </a:prstGeom>
+          <a:noFill/>
+        </p:spPr>
+        <p:txBody>
+          <a:bodyPr rot="0" spcFirstLastPara="0" vertOverflow="overflow" horzOverflow="overflow" vert="horz" wrap="square" lIns="91440" tIns="45720" rIns="91440" bIns="45720" numCol="1" spcCol="0" rtlCol="0" fromWordArt="0" anchor="t" anchorCtr="0" forceAA="0" compatLnSpc="1">
+            <a:prstTxWarp prst="textNoShape">
+              <a:avLst/>
+            </a:prstTxWarp>
+            <a:spAutoFit/>
+          </a:bodyPr>
+          <a:lstStyle/>
+          <a:p>
+            <a:r>
+              <a:rPr lang="en-US">
+                <a:latin typeface="Arial"/>
+                <a:cs typeface="Arial"/>
+              </a:rPr>
+              <a:t>The differences between this graph and the previous graph are miniscule</a:t>
             </a:r>
           </a:p>
         </p:txBody>
@@ -8598,7 +10101,7 @@
         <p:spPr>
           <a:xfrm>
             <a:off x="571500" y="299357"/>
-            <a:ext cx="5959928" cy="584775"/>
+            <a:ext cx="5959928" cy="523220"/>
           </a:xfrm>
           <a:prstGeom prst="rect">
             <a:avLst/>
@@ -8615,7 +10118,10 @@
           <a:lstStyle/>
           <a:p>
             <a:r>
-              <a:rPr lang="en-US" sz="3200"/>
+              <a:rPr lang="en-US" sz="2800">
+                <a:latin typeface="Arial"/>
+                <a:cs typeface="Arial"/>
+              </a:rPr>
               <a:t>Descriptive Statistics for age</a:t>
             </a:r>
           </a:p>
@@ -8653,9 +10159,194 @@
           <a:lstStyle/>
           <a:p>
             <a:r>
-              <a:rPr lang="en-US"/>
+              <a:rPr lang="en-US">
+                <a:latin typeface="Arial"/>
+                <a:cs typeface="Arial"/>
+              </a:rPr>
               <a:t>Original ages of the data</a:t>
             </a:r>
+          </a:p>
+        </p:txBody>
+      </p:sp>
+      <p:sp>
+        <p:nvSpPr>
+          <p:cNvPr id="6" name="TextBox 5">
+            <a:extLst>
+              <a:ext uri="{FF2B5EF4-FFF2-40B4-BE49-F238E27FC236}">
+                <a16:creationId xmlns:a16="http://schemas.microsoft.com/office/drawing/2014/main" id="{4B2BB9FB-ED8B-6604-9A28-735A8B422904}"/>
+              </a:ext>
+            </a:extLst>
+          </p:cNvPr>
+          <p:cNvSpPr txBox="1"/>
+          <p:nvPr/>
+        </p:nvSpPr>
+        <p:spPr>
+          <a:xfrm>
+            <a:off x="3719286" y="1315357"/>
+            <a:ext cx="2467426" cy="646331"/>
+          </a:xfrm>
+          <a:prstGeom prst="rect">
+            <a:avLst/>
+          </a:prstGeom>
+          <a:noFill/>
+        </p:spPr>
+        <p:txBody>
+          <a:bodyPr rot="0" spcFirstLastPara="0" vertOverflow="overflow" horzOverflow="overflow" vert="horz" wrap="square" lIns="91440" tIns="45720" rIns="91440" bIns="45720" numCol="1" spcCol="0" rtlCol="0" fromWordArt="0" anchor="t" anchorCtr="0" forceAA="0" compatLnSpc="1">
+            <a:prstTxWarp prst="textNoShape">
+              <a:avLst/>
+            </a:prstTxWarp>
+            <a:spAutoFit/>
+          </a:bodyPr>
+          <a:lstStyle/>
+          <a:p>
+            <a:r>
+              <a:rPr lang="en-US">
+                <a:latin typeface="Arial"/>
+                <a:cs typeface="Arial"/>
+              </a:rPr>
+              <a:t>Messed up ages with data poisoning</a:t>
+            </a:r>
+          </a:p>
+        </p:txBody>
+      </p:sp>
+      <p:sp>
+        <p:nvSpPr>
+          <p:cNvPr id="7" name="TextBox 6">
+            <a:extLst>
+              <a:ext uri="{FF2B5EF4-FFF2-40B4-BE49-F238E27FC236}">
+                <a16:creationId xmlns:a16="http://schemas.microsoft.com/office/drawing/2014/main" id="{B45A3BF0-7AF4-FA92-CF76-98BDB92EFE1B}"/>
+              </a:ext>
+            </a:extLst>
+          </p:cNvPr>
+          <p:cNvSpPr txBox="1"/>
+          <p:nvPr/>
+        </p:nvSpPr>
+        <p:spPr>
+          <a:xfrm>
+            <a:off x="6640285" y="1478643"/>
+            <a:ext cx="4318000" cy="2308324"/>
+          </a:xfrm>
+          <a:prstGeom prst="rect">
+            <a:avLst/>
+          </a:prstGeom>
+          <a:noFill/>
+        </p:spPr>
+        <p:txBody>
+          <a:bodyPr rot="0" spcFirstLastPara="0" vertOverflow="overflow" horzOverflow="overflow" vert="horz" wrap="square" lIns="91440" tIns="45720" rIns="91440" bIns="45720" numCol="1" spcCol="0" rtlCol="0" fromWordArt="0" anchor="t" anchorCtr="0" forceAA="0" compatLnSpc="1">
+            <a:prstTxWarp prst="textNoShape">
+              <a:avLst/>
+            </a:prstTxWarp>
+            <a:spAutoFit/>
+          </a:bodyPr>
+          <a:lstStyle/>
+          <a:p>
+            <a:r>
+              <a:rPr lang="en-US">
+                <a:latin typeface="Arial"/>
+                <a:cs typeface="Arial"/>
+              </a:rPr>
+              <a:t>Utilized K-Nearest Neighbors machine learning model to make our final predictions. Seemingly, KNN is not affected much by these wildly variant ages. The KNN model fundamentally ignores outliers, so this model is resistant to data poisoning in the form of adding outliers.</a:t>
+            </a:r>
+          </a:p>
+        </p:txBody>
+      </p:sp>
+      <p:sp>
+        <p:nvSpPr>
+          <p:cNvPr id="9" name="Frame 8">
+            <a:extLst>
+              <a:ext uri="{FF2B5EF4-FFF2-40B4-BE49-F238E27FC236}">
+                <a16:creationId xmlns:a16="http://schemas.microsoft.com/office/drawing/2014/main" id="{7386DD9A-A96D-78B0-FED2-9DC59084BD42}"/>
+              </a:ext>
+            </a:extLst>
+          </p:cNvPr>
+          <p:cNvSpPr/>
+          <p:nvPr/>
+        </p:nvSpPr>
+        <p:spPr>
+          <a:xfrm>
+            <a:off x="3619499" y="3501571"/>
+            <a:ext cx="2567214" cy="825499"/>
+          </a:xfrm>
+          <a:prstGeom prst="frame">
+            <a:avLst/>
+          </a:prstGeom>
+        </p:spPr>
+        <p:style>
+          <a:lnRef idx="2">
+            <a:schemeClr val="accent1">
+              <a:shade val="15000"/>
+            </a:schemeClr>
+          </a:lnRef>
+          <a:fillRef idx="1">
+            <a:schemeClr val="accent1"/>
+          </a:fillRef>
+          <a:effectRef idx="0">
+            <a:schemeClr val="accent1"/>
+          </a:effectRef>
+          <a:fontRef idx="minor">
+            <a:schemeClr val="lt1"/>
+          </a:fontRef>
+        </p:style>
+        <p:txBody>
+          <a:bodyPr rtlCol="0" anchor="ctr"/>
+          <a:lstStyle/>
+          <a:p>
+            <a:pPr algn="ctr"/>
+            <a:endParaRPr lang="en-US">
+              <a:solidFill>
+                <a:schemeClr val="tx1"/>
+              </a:solidFill>
+            </a:endParaRPr>
+          </a:p>
+        </p:txBody>
+      </p:sp>
+      <p:sp>
+        <p:nvSpPr>
+          <p:cNvPr id="10" name="Frame 9">
+            <a:extLst>
+              <a:ext uri="{FF2B5EF4-FFF2-40B4-BE49-F238E27FC236}">
+                <a16:creationId xmlns:a16="http://schemas.microsoft.com/office/drawing/2014/main" id="{FD6F3FCD-0AE7-6053-35F9-55D9B9F50353}"/>
+              </a:ext>
+            </a:extLst>
+          </p:cNvPr>
+          <p:cNvSpPr/>
+          <p:nvPr/>
+        </p:nvSpPr>
+        <p:spPr>
+          <a:xfrm>
+            <a:off x="644069" y="3501570"/>
+            <a:ext cx="2403929" cy="825499"/>
+          </a:xfrm>
+          <a:prstGeom prst="frame">
+            <a:avLst/>
+          </a:prstGeom>
+        </p:spPr>
+        <p:style>
+          <a:lnRef idx="2">
+            <a:schemeClr val="accent1">
+              <a:shade val="15000"/>
+            </a:schemeClr>
+          </a:lnRef>
+          <a:fillRef idx="1">
+            <a:schemeClr val="accent1"/>
+          </a:fillRef>
+          <a:effectRef idx="0">
+            <a:schemeClr val="accent1"/>
+          </a:effectRef>
+          <a:fontRef idx="minor">
+            <a:schemeClr val="lt1"/>
+          </a:fontRef>
+        </p:style>
+        <p:txBody>
+          <a:bodyPr rtlCol="0" anchor="ctr"/>
+          <a:lstStyle/>
+          <a:p>
+            <a:pPr algn="ctr"/>
+            <a:endParaRPr lang="en-US">
+              <a:solidFill>
+                <a:schemeClr val="tx1"/>
+              </a:solidFill>
+            </a:endParaRPr>
           </a:p>
         </p:txBody>
       </p:sp>
@@ -8689,55 +10380,12 @@
           <a:chExt cx="0" cy="0"/>
         </a:xfrm>
       </p:grpSpPr>
-      <p:sp>
-        <p:nvSpPr>
-          <p:cNvPr id="2" name="TextBox 1">
+      <p:pic>
+        <p:nvPicPr>
+          <p:cNvPr id="8" name="Picture 7" descr="A blue line graph with numbers&#10;&#10;AI-generated content may be incorrect.">
             <a:extLst>
               <a:ext uri="{FF2B5EF4-FFF2-40B4-BE49-F238E27FC236}">
-                <a16:creationId xmlns:a16="http://schemas.microsoft.com/office/drawing/2014/main" id="{B108EAAF-A577-EC42-D41E-E9B6F8B770AB}"/>
-              </a:ext>
-            </a:extLst>
-          </p:cNvPr>
-          <p:cNvSpPr txBox="1"/>
-          <p:nvPr/>
-        </p:nvSpPr>
-        <p:spPr>
-          <a:xfrm>
-            <a:off x="2322664" y="262393"/>
-            <a:ext cx="7992386" cy="461665"/>
-          </a:xfrm>
-          <a:prstGeom prst="rect">
-            <a:avLst/>
-          </a:prstGeom>
-          <a:noFill/>
-        </p:spPr>
-        <p:txBody>
-          <a:bodyPr wrap="square" lIns="91440" tIns="45720" rIns="91440" bIns="45720" rtlCol="0" anchor="t">
-            <a:spAutoFit/>
-          </a:bodyPr>
-          <a:lstStyle/>
-          <a:p>
-            <a:r>
-              <a:rPr lang="en-US" sz="2400"/>
-              <a:t>Good Data: </a:t>
-            </a:r>
-            <a:r>
-              <a:rPr lang="en-US" sz="2400" err="1"/>
-              <a:t>Knn</a:t>
-            </a:r>
-            <a:r>
-              <a:rPr lang="en-US" sz="2400"/>
-              <a:t> Regressor has better Predictions</a:t>
-            </a:r>
-          </a:p>
-        </p:txBody>
-      </p:sp>
-      <p:pic>
-        <p:nvPicPr>
-          <p:cNvPr id="3" name="Picture 2" descr="A green squares with white text&#10;&#10;AI-generated content may be incorrect.">
-            <a:extLst>
-              <a:ext uri="{FF2B5EF4-FFF2-40B4-BE49-F238E27FC236}">
-                <a16:creationId xmlns:a16="http://schemas.microsoft.com/office/drawing/2014/main" id="{455ED008-A311-ABDC-BF7A-F9109CD8B4EE}"/>
+                <a16:creationId xmlns:a16="http://schemas.microsoft.com/office/drawing/2014/main" id="{D31AFAEA-A4E2-59D9-9F0F-EE2D06D20B58}"/>
               </a:ext>
             </a:extLst>
           </p:cNvPr>
@@ -8754,8 +10402,8 @@
         </p:blipFill>
         <p:spPr>
           <a:xfrm>
-            <a:off x="6131381" y="1731105"/>
-            <a:ext cx="5380889" cy="4219754"/>
+            <a:off x="4127" y="1248728"/>
+            <a:ext cx="4780915" cy="2797810"/>
           </a:xfrm>
           <a:prstGeom prst="rect">
             <a:avLst/>
@@ -8764,64 +10412,10 @@
       </p:pic>
       <p:sp>
         <p:nvSpPr>
-          <p:cNvPr id="4" name="Rectangle 3">
+          <p:cNvPr id="3" name="TextBox 2">
             <a:extLst>
               <a:ext uri="{FF2B5EF4-FFF2-40B4-BE49-F238E27FC236}">
-                <a16:creationId xmlns:a16="http://schemas.microsoft.com/office/drawing/2014/main" id="{07B61423-83D8-27DA-0DE5-795EBB7B412E}"/>
-              </a:ext>
-            </a:extLst>
-          </p:cNvPr>
-          <p:cNvSpPr/>
-          <p:nvPr/>
-        </p:nvSpPr>
-        <p:spPr>
-          <a:xfrm>
-            <a:off x="7569478" y="1875146"/>
-            <a:ext cx="3017520" cy="228600"/>
-          </a:xfrm>
-          <a:prstGeom prst="rect">
-            <a:avLst/>
-          </a:prstGeom>
-          <a:solidFill>
-            <a:schemeClr val="tx1"/>
-          </a:solidFill>
-          <a:ln>
-            <a:solidFill>
-              <a:schemeClr val="tx1"/>
-            </a:solidFill>
-          </a:ln>
-        </p:spPr>
-        <p:style>
-          <a:lnRef idx="2">
-            <a:schemeClr val="accent1">
-              <a:shade val="15000"/>
-            </a:schemeClr>
-          </a:lnRef>
-          <a:fillRef idx="1">
-            <a:schemeClr val="accent1"/>
-          </a:fillRef>
-          <a:effectRef idx="0">
-            <a:schemeClr val="accent1"/>
-          </a:effectRef>
-          <a:fontRef idx="minor">
-            <a:schemeClr val="lt1"/>
-          </a:fontRef>
-        </p:style>
-        <p:txBody>
-          <a:bodyPr rtlCol="0" anchor="ctr"/>
-          <a:lstStyle/>
-          <a:p>
-            <a:pPr algn="ctr"/>
-            <a:endParaRPr lang="en-US"/>
-          </a:p>
-        </p:txBody>
-      </p:sp>
-      <p:sp>
-        <p:nvSpPr>
-          <p:cNvPr id="5" name="TextBox 4">
-            <a:extLst>
-              <a:ext uri="{FF2B5EF4-FFF2-40B4-BE49-F238E27FC236}">
-                <a16:creationId xmlns:a16="http://schemas.microsoft.com/office/drawing/2014/main" id="{B95F2D5F-6E69-8479-8E04-9BA58E448B81}"/>
+                <a16:creationId xmlns:a16="http://schemas.microsoft.com/office/drawing/2014/main" id="{E7150560-FDEA-AEE0-D169-4B641397D91E}"/>
               </a:ext>
             </a:extLst>
           </p:cNvPr>
@@ -8830,8 +10424,46 @@
         </p:nvSpPr>
         <p:spPr>
           <a:xfrm>
-            <a:off x="7132320" y="1798111"/>
-            <a:ext cx="3891280" cy="369332"/>
+            <a:off x="1072984" y="323353"/>
+            <a:ext cx="7992386" cy="523220"/>
+          </a:xfrm>
+          <a:prstGeom prst="rect">
+            <a:avLst/>
+          </a:prstGeom>
+          <a:noFill/>
+        </p:spPr>
+        <p:txBody>
+          <a:bodyPr wrap="square" lIns="91440" tIns="45720" rIns="91440" bIns="45720" rtlCol="0" anchor="t">
+            <a:spAutoFit/>
+          </a:bodyPr>
+          <a:lstStyle/>
+          <a:p>
+            <a:r>
+              <a:rPr lang="en-US" sz="2800">
+                <a:latin typeface="Arial"/>
+                <a:cs typeface="Arial"/>
+              </a:rPr>
+              <a:t>Predicting Olympic medalists</a:t>
+            </a:r>
+          </a:p>
+        </p:txBody>
+      </p:sp>
+      <p:sp>
+        <p:nvSpPr>
+          <p:cNvPr id="4" name="TextBox 3">
+            <a:extLst>
+              <a:ext uri="{FF2B5EF4-FFF2-40B4-BE49-F238E27FC236}">
+                <a16:creationId xmlns:a16="http://schemas.microsoft.com/office/drawing/2014/main" id="{8B9EB567-D992-BD9D-8CD2-9017590843E9}"/>
+              </a:ext>
+            </a:extLst>
+          </p:cNvPr>
+          <p:cNvSpPr txBox="1"/>
+          <p:nvPr/>
+        </p:nvSpPr>
+        <p:spPr>
+          <a:xfrm>
+            <a:off x="1087120" y="883920"/>
+            <a:ext cx="7081520" cy="369332"/>
           </a:xfrm>
           <a:prstGeom prst="rect">
             <a:avLst/>
@@ -8849,21 +10481,98 @@
           <a:p>
             <a:r>
               <a:rPr lang="en-US">
-                <a:solidFill>
-                  <a:schemeClr val="bg1"/>
-                </a:solidFill>
+                <a:latin typeface="Arial"/>
+                <a:cs typeface="Arial"/>
               </a:rPr>
-              <a:t>KNN Regressor Success Rate</a:t>
+              <a:t>With 8000 competitors 6500 did not earn medals</a:t>
+            </a:r>
+          </a:p>
+        </p:txBody>
+      </p:sp>
+      <p:sp>
+        <p:nvSpPr>
+          <p:cNvPr id="5" name="TextBox 4">
+            <a:extLst>
+              <a:ext uri="{FF2B5EF4-FFF2-40B4-BE49-F238E27FC236}">
+                <a16:creationId xmlns:a16="http://schemas.microsoft.com/office/drawing/2014/main" id="{7534969B-3141-808D-3E6D-E9A20B5664C8}"/>
+              </a:ext>
+            </a:extLst>
+          </p:cNvPr>
+          <p:cNvSpPr txBox="1"/>
+          <p:nvPr/>
+        </p:nvSpPr>
+        <p:spPr>
+          <a:xfrm>
+            <a:off x="1386840" y="1508760"/>
+            <a:ext cx="2743200" cy="365760"/>
+          </a:xfrm>
+          <a:prstGeom prst="rect">
+            <a:avLst/>
+          </a:prstGeom>
+          <a:noFill/>
+        </p:spPr>
+        <p:txBody>
+          <a:bodyPr rot="0" spcFirstLastPara="0" vertOverflow="overflow" horzOverflow="overflow" vert="horz" wrap="square" lIns="91440" tIns="45720" rIns="91440" bIns="45720" numCol="1" spcCol="0" rtlCol="0" fromWordArt="0" anchor="t" anchorCtr="0" forceAA="0" compatLnSpc="1">
+            <a:prstTxWarp prst="textNoShape">
+              <a:avLst/>
+            </a:prstTxWarp>
+            <a:spAutoFit/>
+          </a:bodyPr>
+          <a:lstStyle/>
+          <a:p>
+            <a:pPr algn="l"/>
+            <a:r>
+              <a:rPr lang="en-US"/>
+              <a:t>Height</a:t>
+            </a:r>
+          </a:p>
+        </p:txBody>
+      </p:sp>
+      <p:sp>
+        <p:nvSpPr>
+          <p:cNvPr id="6" name="TextBox 5">
+            <a:extLst>
+              <a:ext uri="{FF2B5EF4-FFF2-40B4-BE49-F238E27FC236}">
+                <a16:creationId xmlns:a16="http://schemas.microsoft.com/office/drawing/2014/main" id="{B54B4B66-D7E9-1406-64DC-50F3227259FC}"/>
+              </a:ext>
+            </a:extLst>
+          </p:cNvPr>
+          <p:cNvSpPr txBox="1"/>
+          <p:nvPr/>
+        </p:nvSpPr>
+        <p:spPr>
+          <a:xfrm>
+            <a:off x="6311418" y="1700564"/>
+            <a:ext cx="2743200" cy="365760"/>
+          </a:xfrm>
+          <a:prstGeom prst="rect">
+            <a:avLst/>
+          </a:prstGeom>
+          <a:noFill/>
+        </p:spPr>
+        <p:txBody>
+          <a:bodyPr rot="0" spcFirstLastPara="0" vertOverflow="overflow" horzOverflow="overflow" vert="horz" wrap="square" lIns="91440" tIns="45720" rIns="91440" bIns="45720" numCol="1" spcCol="0" rtlCol="0" fromWordArt="0" anchor="t" anchorCtr="0" forceAA="0" compatLnSpc="1">
+            <a:prstTxWarp prst="textNoShape">
+              <a:avLst/>
+            </a:prstTxWarp>
+            <a:spAutoFit/>
+          </a:bodyPr>
+          <a:lstStyle/>
+          <a:p>
+            <a:pPr algn="l"/>
+            <a:r>
+              <a:rPr lang="en-US"/>
+              <a:t>Weight</a:t>
             </a:r>
           </a:p>
         </p:txBody>
       </p:sp>
       <p:pic>
         <p:nvPicPr>
-          <p:cNvPr id="6" name="Picture 5" descr="A blue squares with white text&#10;&#10;AI-generated content may be incorrect.">
+          <p:cNvPr id="7" name="Picture 6" descr="A graph with numbers and lines&#10;&#10;AI-generated content may be incorrect.">
             <a:extLst>
               <a:ext uri="{FF2B5EF4-FFF2-40B4-BE49-F238E27FC236}">
-                <a16:creationId xmlns:a16="http://schemas.microsoft.com/office/drawing/2014/main" id="{40EE1AD2-4FBB-8FF6-3DF5-F5BD56D0EC37}"/>
+                <a16:creationId xmlns:a16="http://schemas.microsoft.com/office/drawing/2014/main" id="{CCCAA4EF-BD1D-B52A-E9A8-803C1F186889}"/>
               </a:ext>
             </a:extLst>
           </p:cNvPr>
@@ -8880,74 +10589,80 @@
         </p:blipFill>
         <p:spPr>
           <a:xfrm>
-            <a:off x="745618" y="1739477"/>
-            <a:ext cx="5354064" cy="4203700"/>
+            <a:off x="7403148" y="4045268"/>
+            <a:ext cx="4792345" cy="2800985"/>
           </a:xfrm>
           <a:prstGeom prst="rect">
             <a:avLst/>
           </a:prstGeom>
         </p:spPr>
       </p:pic>
-      <p:sp>
-        <p:nvSpPr>
-          <p:cNvPr id="7" name="Rectangle 6">
+      <p:pic>
+        <p:nvPicPr>
+          <p:cNvPr id="9" name="Picture 8" descr="A graph of weight loss&#10;&#10;AI-generated content may be incorrect.">
             <a:extLst>
               <a:ext uri="{FF2B5EF4-FFF2-40B4-BE49-F238E27FC236}">
-                <a16:creationId xmlns:a16="http://schemas.microsoft.com/office/drawing/2014/main" id="{DC75750A-E3F1-D8EB-031E-7D0CC1F96767}"/>
+                <a16:creationId xmlns:a16="http://schemas.microsoft.com/office/drawing/2014/main" id="{C862E688-1A27-5763-1885-DECCD5A84481}"/>
               </a:ext>
             </a:extLst>
           </p:cNvPr>
-          <p:cNvSpPr/>
+          <p:cNvPicPr>
+            <a:picLocks noChangeAspect="1"/>
+          </p:cNvPicPr>
           <p:nvPr/>
-        </p:nvSpPr>
+        </p:nvPicPr>
+        <p:blipFill>
+          <a:blip r:embed="rId4"/>
+          <a:stretch>
+            <a:fillRect/>
+          </a:stretch>
+        </p:blipFill>
         <p:spPr>
           <a:xfrm>
-            <a:off x="1706880" y="1887255"/>
-            <a:ext cx="3444240" cy="426720"/>
+            <a:off x="7408228" y="1256348"/>
+            <a:ext cx="4782185" cy="2800350"/>
           </a:xfrm>
           <a:prstGeom prst="rect">
             <a:avLst/>
           </a:prstGeom>
-          <a:solidFill>
-            <a:schemeClr val="tx1"/>
-          </a:solidFill>
-          <a:ln>
-            <a:solidFill>
-              <a:schemeClr val="tx1"/>
-            </a:solidFill>
-          </a:ln>
-        </p:spPr>
-        <p:style>
-          <a:lnRef idx="2">
-            <a:schemeClr val="accent1">
-              <a:shade val="15000"/>
-            </a:schemeClr>
-          </a:lnRef>
-          <a:fillRef idx="1">
-            <a:schemeClr val="accent1"/>
-          </a:fillRef>
-          <a:effectRef idx="0">
-            <a:schemeClr val="accent1"/>
-          </a:effectRef>
-          <a:fontRef idx="minor">
-            <a:schemeClr val="lt1"/>
-          </a:fontRef>
-        </p:style>
-        <p:txBody>
-          <a:bodyPr rtlCol="0" anchor="ctr"/>
-          <a:lstStyle/>
-          <a:p>
-            <a:pPr algn="ctr"/>
-            <a:endParaRPr lang="en-US"/>
-          </a:p>
-        </p:txBody>
-      </p:sp>
-      <p:sp>
-        <p:nvSpPr>
-          <p:cNvPr id="8" name="TextBox 7">
+        </p:spPr>
+      </p:pic>
+      <p:pic>
+        <p:nvPicPr>
+          <p:cNvPr id="10" name="Picture 9" descr="A graph with numbers and lines&#10;&#10;AI-generated content may be incorrect.">
             <a:extLst>
               <a:ext uri="{FF2B5EF4-FFF2-40B4-BE49-F238E27FC236}">
-                <a16:creationId xmlns:a16="http://schemas.microsoft.com/office/drawing/2014/main" id="{F30D0C0D-94E7-1197-0084-416422FCB1A5}"/>
+                <a16:creationId xmlns:a16="http://schemas.microsoft.com/office/drawing/2014/main" id="{09D05CEB-8EBA-DAF9-0FE5-CBB43E505ECE}"/>
+              </a:ext>
+            </a:extLst>
+          </p:cNvPr>
+          <p:cNvPicPr>
+            <a:picLocks noChangeAspect="1"/>
+          </p:cNvPicPr>
+          <p:nvPr/>
+        </p:nvPicPr>
+        <p:blipFill>
+          <a:blip r:embed="rId5"/>
+          <a:stretch>
+            <a:fillRect/>
+          </a:stretch>
+        </p:blipFill>
+        <p:spPr>
+          <a:xfrm>
+            <a:off x="-953" y="4047808"/>
+            <a:ext cx="4665980" cy="2783840"/>
+          </a:xfrm>
+          <a:prstGeom prst="rect">
+            <a:avLst/>
+          </a:prstGeom>
+        </p:spPr>
+      </p:pic>
+      <p:sp>
+        <p:nvSpPr>
+          <p:cNvPr id="11" name="TextBox 10">
+            <a:extLst>
+              <a:ext uri="{FF2B5EF4-FFF2-40B4-BE49-F238E27FC236}">
+                <a16:creationId xmlns:a16="http://schemas.microsoft.com/office/drawing/2014/main" id="{0A4DB268-94E1-321F-7F37-D2B02B0B3A10}"/>
               </a:ext>
             </a:extLst>
           </p:cNvPr>
@@ -8956,8 +10671,8 @@
         </p:nvSpPr>
         <p:spPr>
           <a:xfrm>
-            <a:off x="1790596" y="1878486"/>
-            <a:ext cx="3606800" cy="369332"/>
+            <a:off x="4785360" y="1691640"/>
+            <a:ext cx="2743200" cy="646331"/>
           </a:xfrm>
           <a:prstGeom prst="rect">
             <a:avLst/>
@@ -8973,13 +10688,89 @@
           </a:bodyPr>
           <a:lstStyle/>
           <a:p>
-            <a:r>
-              <a:rPr lang="en-US">
-                <a:solidFill>
-                  <a:schemeClr val="bg1"/>
-                </a:solidFill>
-              </a:rPr>
-              <a:t>Linear Classifier Success</a:t>
+            <a:pPr algn="l"/>
+            <a:r>
+              <a:rPr lang="en-US"/>
+              <a:t>Height</a:t>
+            </a:r>
+          </a:p>
+          <a:p>
+            <a:endParaRPr lang="en-US"/>
+          </a:p>
+        </p:txBody>
+      </p:sp>
+      <p:sp>
+        <p:nvSpPr>
+          <p:cNvPr id="12" name="TextBox 11">
+            <a:extLst>
+              <a:ext uri="{FF2B5EF4-FFF2-40B4-BE49-F238E27FC236}">
+                <a16:creationId xmlns:a16="http://schemas.microsoft.com/office/drawing/2014/main" id="{8A102F68-4986-590E-FAA2-E13756DC2435}"/>
+              </a:ext>
+            </a:extLst>
+          </p:cNvPr>
+          <p:cNvSpPr txBox="1"/>
+          <p:nvPr/>
+        </p:nvSpPr>
+        <p:spPr>
+          <a:xfrm>
+            <a:off x="5151120" y="2026920"/>
+            <a:ext cx="2743200" cy="461665"/>
+          </a:xfrm>
+          <a:prstGeom prst="rect">
+            <a:avLst/>
+          </a:prstGeom>
+          <a:noFill/>
+        </p:spPr>
+        <p:txBody>
+          <a:bodyPr rot="0" spcFirstLastPara="0" vertOverflow="overflow" horzOverflow="overflow" vert="horz" wrap="square" lIns="91440" tIns="45720" rIns="91440" bIns="45720" numCol="1" spcCol="0" rtlCol="0" fromWordArt="0" anchor="t" anchorCtr="0" forceAA="0" compatLnSpc="1">
+            <a:prstTxWarp prst="textNoShape">
+              <a:avLst/>
+            </a:prstTxWarp>
+            <a:spAutoFit/>
+          </a:bodyPr>
+          <a:lstStyle/>
+          <a:p>
+            <a:r>
+              <a:rPr lang="en-US" sz="2400"/>
+              <a:t>Good Data</a:t>
+            </a:r>
+          </a:p>
+        </p:txBody>
+      </p:sp>
+      <p:sp>
+        <p:nvSpPr>
+          <p:cNvPr id="13" name="TextBox 12">
+            <a:extLst>
+              <a:ext uri="{FF2B5EF4-FFF2-40B4-BE49-F238E27FC236}">
+                <a16:creationId xmlns:a16="http://schemas.microsoft.com/office/drawing/2014/main" id="{3BBBB0B8-F420-0747-BAF1-759BE9E8C525}"/>
+              </a:ext>
+            </a:extLst>
+          </p:cNvPr>
+          <p:cNvSpPr txBox="1"/>
+          <p:nvPr/>
+        </p:nvSpPr>
+        <p:spPr>
+          <a:xfrm>
+            <a:off x="5262880" y="4424680"/>
+            <a:ext cx="2743200" cy="461665"/>
+          </a:xfrm>
+          <a:prstGeom prst="rect">
+            <a:avLst/>
+          </a:prstGeom>
+          <a:noFill/>
+        </p:spPr>
+        <p:txBody>
+          <a:bodyPr rot="0" spcFirstLastPara="0" vertOverflow="overflow" horzOverflow="overflow" vert="horz" wrap="square" lIns="91440" tIns="45720" rIns="91440" bIns="45720" numCol="1" spcCol="0" rtlCol="0" fromWordArt="0" anchor="t" anchorCtr="0" forceAA="0" compatLnSpc="1">
+            <a:prstTxWarp prst="textNoShape">
+              <a:avLst/>
+            </a:prstTxWarp>
+            <a:spAutoFit/>
+          </a:bodyPr>
+          <a:lstStyle/>
+          <a:p>
+            <a:r>
+              <a:rPr lang="en-US" sz="2400"/>
+              <a:t>Bad Data</a:t>
             </a:r>
           </a:p>
         </p:txBody>
@@ -8987,7 +10778,7 @@
     </p:spTree>
     <p:extLst>
       <p:ext uri="{BB962C8B-B14F-4D97-AF65-F5344CB8AC3E}">
-        <p14:creationId xmlns:p14="http://schemas.microsoft.com/office/powerpoint/2010/main" val="3542396603"/>
+        <p14:creationId xmlns:p14="http://schemas.microsoft.com/office/powerpoint/2010/main" val="2205884802"/>
       </p:ext>
     </p:extLst>
   </p:cSld>
@@ -9019,7 +10810,7 @@
           <p:cNvPr id="2" name="TextBox 1">
             <a:extLst>
               <a:ext uri="{FF2B5EF4-FFF2-40B4-BE49-F238E27FC236}">
-                <a16:creationId xmlns:a16="http://schemas.microsoft.com/office/drawing/2014/main" id="{824E0ABB-5C1A-7F4C-215F-D6D178343EF0}"/>
+                <a16:creationId xmlns:a16="http://schemas.microsoft.com/office/drawing/2014/main" id="{B108EAAF-A577-EC42-D41E-E9B6F8B770AB}"/>
               </a:ext>
             </a:extLst>
           </p:cNvPr>
@@ -9028,8 +10819,147 @@
         </p:nvSpPr>
         <p:spPr>
           <a:xfrm>
-            <a:off x="929640" y="518160"/>
-            <a:ext cx="2743200" cy="365760"/>
+            <a:off x="1255864" y="262393"/>
+            <a:ext cx="9861826" cy="523220"/>
+          </a:xfrm>
+          <a:prstGeom prst="rect">
+            <a:avLst/>
+          </a:prstGeom>
+          <a:noFill/>
+        </p:spPr>
+        <p:txBody>
+          <a:bodyPr wrap="square" lIns="91440" tIns="45720" rIns="91440" bIns="45720" rtlCol="0" anchor="t">
+            <a:spAutoFit/>
+          </a:bodyPr>
+          <a:lstStyle/>
+          <a:p>
+            <a:r>
+              <a:rPr lang="en-US" sz="2800">
+                <a:latin typeface="Arial"/>
+                <a:cs typeface="Arial"/>
+              </a:rPr>
+              <a:t>Good Data: </a:t>
+            </a:r>
+            <a:r>
+              <a:rPr lang="en-US" sz="2800" err="1">
+                <a:latin typeface="Arial"/>
+                <a:cs typeface="Arial"/>
+              </a:rPr>
+              <a:t>Knn</a:t>
+            </a:r>
+            <a:r>
+              <a:rPr lang="en-US" sz="2800">
+                <a:latin typeface="Arial"/>
+                <a:cs typeface="Arial"/>
+              </a:rPr>
+              <a:t> Classifier has better predictions</a:t>
+            </a:r>
+          </a:p>
+        </p:txBody>
+      </p:sp>
+      <p:pic>
+        <p:nvPicPr>
+          <p:cNvPr id="3" name="Picture 2" descr="A green squares with white text&#10;&#10;AI-generated content may be incorrect.">
+            <a:extLst>
+              <a:ext uri="{FF2B5EF4-FFF2-40B4-BE49-F238E27FC236}">
+                <a16:creationId xmlns:a16="http://schemas.microsoft.com/office/drawing/2014/main" id="{455ED008-A311-ABDC-BF7A-F9109CD8B4EE}"/>
+              </a:ext>
+            </a:extLst>
+          </p:cNvPr>
+          <p:cNvPicPr>
+            <a:picLocks noChangeAspect="1"/>
+          </p:cNvPicPr>
+          <p:nvPr/>
+        </p:nvPicPr>
+        <p:blipFill>
+          <a:blip r:embed="rId2"/>
+          <a:stretch>
+            <a:fillRect/>
+          </a:stretch>
+        </p:blipFill>
+        <p:spPr>
+          <a:xfrm>
+            <a:off x="6152547" y="1064355"/>
+            <a:ext cx="5359723" cy="4219754"/>
+          </a:xfrm>
+          <a:prstGeom prst="rect">
+            <a:avLst/>
+          </a:prstGeom>
+        </p:spPr>
+      </p:pic>
+      <p:sp>
+        <p:nvSpPr>
+          <p:cNvPr id="4" name="Rectangle 3">
+            <a:extLst>
+              <a:ext uri="{FF2B5EF4-FFF2-40B4-BE49-F238E27FC236}">
+                <a16:creationId xmlns:a16="http://schemas.microsoft.com/office/drawing/2014/main" id="{07B61423-83D8-27DA-0DE5-795EBB7B412E}"/>
+              </a:ext>
+            </a:extLst>
+          </p:cNvPr>
+          <p:cNvSpPr/>
+          <p:nvPr/>
+        </p:nvSpPr>
+        <p:spPr>
+          <a:xfrm>
+            <a:off x="7326061" y="1261313"/>
+            <a:ext cx="3017520" cy="228600"/>
+          </a:xfrm>
+          <a:prstGeom prst="rect">
+            <a:avLst/>
+          </a:prstGeom>
+          <a:solidFill>
+            <a:schemeClr val="tx1"/>
+          </a:solidFill>
+          <a:ln>
+            <a:solidFill>
+              <a:schemeClr val="tx1"/>
+            </a:solidFill>
+          </a:ln>
+        </p:spPr>
+        <p:style>
+          <a:lnRef idx="2">
+            <a:schemeClr val="accent1">
+              <a:shade val="15000"/>
+            </a:schemeClr>
+          </a:lnRef>
+          <a:fillRef idx="1">
+            <a:schemeClr val="accent1"/>
+          </a:fillRef>
+          <a:effectRef idx="0">
+            <a:schemeClr val="accent1"/>
+          </a:effectRef>
+          <a:fontRef idx="minor">
+            <a:schemeClr val="lt1"/>
+          </a:fontRef>
+        </p:style>
+        <p:txBody>
+          <a:bodyPr rtlCol="0" anchor="ctr"/>
+          <a:lstStyle/>
+          <a:p>
+            <a:pPr algn="ctr"/>
+            <a:endParaRPr lang="en-US">
+              <a:latin typeface="Arial"/>
+              <a:cs typeface="Arial"/>
+            </a:endParaRPr>
+          </a:p>
+        </p:txBody>
+      </p:sp>
+      <p:sp>
+        <p:nvSpPr>
+          <p:cNvPr id="5" name="TextBox 4">
+            <a:extLst>
+              <a:ext uri="{FF2B5EF4-FFF2-40B4-BE49-F238E27FC236}">
+                <a16:creationId xmlns:a16="http://schemas.microsoft.com/office/drawing/2014/main" id="{B95F2D5F-6E69-8479-8E04-9BA58E448B81}"/>
+              </a:ext>
+            </a:extLst>
+          </p:cNvPr>
+          <p:cNvSpPr txBox="1"/>
+          <p:nvPr/>
+        </p:nvSpPr>
+        <p:spPr>
+          <a:xfrm>
+            <a:off x="7206403" y="1120777"/>
+            <a:ext cx="3891280" cy="369332"/>
           </a:xfrm>
           <a:prstGeom prst="rect">
             <a:avLst/>
@@ -9045,18 +10975,215 @@
           </a:bodyPr>
           <a:lstStyle/>
           <a:p>
+            <a:r>
+              <a:rPr lang="en-US">
+                <a:solidFill>
+                  <a:schemeClr val="bg1"/>
+                </a:solidFill>
+                <a:latin typeface="Arial"/>
+                <a:cs typeface="Arial"/>
+              </a:rPr>
+              <a:t>KNN Regressor Success Rate</a:t>
+            </a:r>
+          </a:p>
+        </p:txBody>
+      </p:sp>
+      <p:pic>
+        <p:nvPicPr>
+          <p:cNvPr id="6" name="Picture 5" descr="A blue squares with white text&#10;&#10;AI-generated content may be incorrect.">
+            <a:extLst>
+              <a:ext uri="{FF2B5EF4-FFF2-40B4-BE49-F238E27FC236}">
+                <a16:creationId xmlns:a16="http://schemas.microsoft.com/office/drawing/2014/main" id="{40EE1AD2-4FBB-8FF6-3DF5-F5BD56D0EC37}"/>
+              </a:ext>
+            </a:extLst>
+          </p:cNvPr>
+          <p:cNvPicPr>
+            <a:picLocks noChangeAspect="1"/>
+          </p:cNvPicPr>
+          <p:nvPr/>
+        </p:nvPicPr>
+        <p:blipFill>
+          <a:blip r:embed="rId3"/>
+          <a:stretch>
+            <a:fillRect/>
+          </a:stretch>
+        </p:blipFill>
+        <p:spPr>
+          <a:xfrm>
+            <a:off x="745618" y="1062144"/>
+            <a:ext cx="5354064" cy="4203700"/>
+          </a:xfrm>
+          <a:prstGeom prst="rect">
+            <a:avLst/>
+          </a:prstGeom>
+        </p:spPr>
+      </p:pic>
+      <p:sp>
+        <p:nvSpPr>
+          <p:cNvPr id="7" name="Rectangle 6">
+            <a:extLst>
+              <a:ext uri="{FF2B5EF4-FFF2-40B4-BE49-F238E27FC236}">
+                <a16:creationId xmlns:a16="http://schemas.microsoft.com/office/drawing/2014/main" id="{DC75750A-E3F1-D8EB-031E-7D0CC1F96767}"/>
+              </a:ext>
+            </a:extLst>
+          </p:cNvPr>
+          <p:cNvSpPr/>
+          <p:nvPr/>
+        </p:nvSpPr>
+        <p:spPr>
+          <a:xfrm>
+            <a:off x="1865630" y="1125255"/>
+            <a:ext cx="3444240" cy="426720"/>
+          </a:xfrm>
+          <a:prstGeom prst="rect">
+            <a:avLst/>
+          </a:prstGeom>
+          <a:solidFill>
+            <a:schemeClr val="tx1"/>
+          </a:solidFill>
+          <a:ln>
+            <a:solidFill>
+              <a:schemeClr val="tx1"/>
+            </a:solidFill>
+          </a:ln>
+        </p:spPr>
+        <p:style>
+          <a:lnRef idx="2">
+            <a:schemeClr val="accent1">
+              <a:shade val="15000"/>
+            </a:schemeClr>
+          </a:lnRef>
+          <a:fillRef idx="1">
+            <a:schemeClr val="accent1"/>
+          </a:fillRef>
+          <a:effectRef idx="0">
+            <a:schemeClr val="accent1"/>
+          </a:effectRef>
+          <a:fontRef idx="minor">
+            <a:schemeClr val="lt1"/>
+          </a:fontRef>
+        </p:style>
+        <p:txBody>
+          <a:bodyPr rtlCol="0" anchor="ctr"/>
+          <a:lstStyle/>
+          <a:p>
+            <a:pPr algn="ctr"/>
+            <a:endParaRPr lang="en-US">
+              <a:latin typeface="Arial"/>
+              <a:cs typeface="Arial"/>
+            </a:endParaRPr>
+          </a:p>
+        </p:txBody>
+      </p:sp>
+      <p:sp>
+        <p:nvSpPr>
+          <p:cNvPr id="8" name="TextBox 7">
+            <a:extLst>
+              <a:ext uri="{FF2B5EF4-FFF2-40B4-BE49-F238E27FC236}">
+                <a16:creationId xmlns:a16="http://schemas.microsoft.com/office/drawing/2014/main" id="{F30D0C0D-94E7-1197-0084-416422FCB1A5}"/>
+              </a:ext>
+            </a:extLst>
+          </p:cNvPr>
+          <p:cNvSpPr txBox="1"/>
+          <p:nvPr/>
+        </p:nvSpPr>
+        <p:spPr>
+          <a:xfrm>
+            <a:off x="1864679" y="1190569"/>
+            <a:ext cx="3606800" cy="369332"/>
+          </a:xfrm>
+          <a:prstGeom prst="rect">
+            <a:avLst/>
+          </a:prstGeom>
+          <a:noFill/>
+        </p:spPr>
+        <p:txBody>
+          <a:bodyPr rot="0" spcFirstLastPara="0" vertOverflow="overflow" horzOverflow="overflow" vert="horz" wrap="square" lIns="91440" tIns="45720" rIns="91440" bIns="45720" numCol="1" spcCol="0" rtlCol="0" fromWordArt="0" anchor="t" anchorCtr="0" forceAA="0" compatLnSpc="1">
+            <a:prstTxWarp prst="textNoShape">
+              <a:avLst/>
+            </a:prstTxWarp>
+            <a:spAutoFit/>
+          </a:bodyPr>
+          <a:lstStyle/>
+          <a:p>
+            <a:r>
+              <a:rPr lang="en-US">
+                <a:solidFill>
+                  <a:schemeClr val="bg1"/>
+                </a:solidFill>
+                <a:latin typeface="Arial"/>
+                <a:cs typeface="Arial"/>
+              </a:rPr>
+              <a:t>Linear Classifier Success</a:t>
+            </a:r>
+          </a:p>
+        </p:txBody>
+      </p:sp>
+      <p:sp>
+        <p:nvSpPr>
+          <p:cNvPr id="10" name="TextBox 9">
+            <a:extLst>
+              <a:ext uri="{FF2B5EF4-FFF2-40B4-BE49-F238E27FC236}">
+                <a16:creationId xmlns:a16="http://schemas.microsoft.com/office/drawing/2014/main" id="{122EFE42-5CDB-273D-0548-05CD2EC27798}"/>
+              </a:ext>
+            </a:extLst>
+          </p:cNvPr>
+          <p:cNvSpPr txBox="1"/>
+          <p:nvPr/>
+        </p:nvSpPr>
+        <p:spPr>
+          <a:xfrm>
+            <a:off x="760730" y="5501640"/>
+            <a:ext cx="10744200" cy="923330"/>
+          </a:xfrm>
+          <a:prstGeom prst="rect">
+            <a:avLst/>
+          </a:prstGeom>
+          <a:noFill/>
+        </p:spPr>
+        <p:txBody>
+          <a:bodyPr rot="0" spcFirstLastPara="0" vertOverflow="overflow" horzOverflow="overflow" vert="horz" wrap="square" lIns="91440" tIns="45720" rIns="91440" bIns="45720" numCol="1" spcCol="0" rtlCol="0" fromWordArt="0" anchor="t" anchorCtr="0" forceAA="0" compatLnSpc="1">
+            <a:prstTxWarp prst="textNoShape">
+              <a:avLst/>
+            </a:prstTxWarp>
+            <a:spAutoFit/>
+          </a:bodyPr>
+          <a:lstStyle/>
+          <a:p>
             <a:pPr algn="l"/>
             <a:r>
-              <a:rPr lang="en-US"/>
-              <a:t>Tree</a:t>
-            </a:r>
+              <a:rPr lang="en-US">
+                <a:latin typeface="Arial"/>
+                <a:cs typeface="Arial"/>
+              </a:rPr>
+              <a:t>Terms:</a:t>
+            </a:r>
+          </a:p>
+          <a:p>
+            <a:r>
+              <a:rPr lang="en-US">
+                <a:latin typeface="Arial"/>
+                <a:cs typeface="Arial"/>
+              </a:rPr>
+              <a:t>  Photo-finish silver| Equipment issue | Final appearance</a:t>
+            </a:r>
+          </a:p>
+          <a:p>
+            <a:pPr marL="285750" indent="-285750">
+              <a:buFont typeface="Arial"/>
+              <a:buChar char="•"/>
+            </a:pPr>
+            <a:endParaRPr lang="en-US">
+              <a:latin typeface="Arial"/>
+              <a:cs typeface="Arial"/>
+            </a:endParaRPr>
           </a:p>
         </p:txBody>
       </p:sp>
     </p:spTree>
     <p:extLst>
       <p:ext uri="{BB962C8B-B14F-4D97-AF65-F5344CB8AC3E}">
-        <p14:creationId xmlns:p14="http://schemas.microsoft.com/office/powerpoint/2010/main" val="2486051660"/>
+        <p14:creationId xmlns:p14="http://schemas.microsoft.com/office/powerpoint/2010/main" val="3542396603"/>
       </p:ext>
     </p:extLst>
   </p:cSld>
@@ -9085,6 +11212,391 @@
       </p:grpSpPr>
       <p:sp>
         <p:nvSpPr>
+          <p:cNvPr id="3" name="TextBox 2">
+            <a:extLst>
+              <a:ext uri="{FF2B5EF4-FFF2-40B4-BE49-F238E27FC236}">
+                <a16:creationId xmlns:a16="http://schemas.microsoft.com/office/drawing/2014/main" id="{B70C430F-56B2-7312-F01C-B022BD07393C}"/>
+              </a:ext>
+            </a:extLst>
+          </p:cNvPr>
+          <p:cNvSpPr txBox="1"/>
+          <p:nvPr/>
+        </p:nvSpPr>
+        <p:spPr>
+          <a:xfrm>
+            <a:off x="914400" y="320040"/>
+            <a:ext cx="9662160" cy="1015663"/>
+          </a:xfrm>
+          <a:prstGeom prst="rect">
+            <a:avLst/>
+          </a:prstGeom>
+          <a:noFill/>
+        </p:spPr>
+        <p:txBody>
+          <a:bodyPr rot="0" spcFirstLastPara="0" vertOverflow="overflow" horzOverflow="overflow" vert="horz" wrap="square" lIns="91440" tIns="45720" rIns="91440" bIns="45720" numCol="1" spcCol="0" rtlCol="0" fromWordArt="0" anchor="t" anchorCtr="0" forceAA="0" compatLnSpc="1">
+            <a:prstTxWarp prst="textNoShape">
+              <a:avLst/>
+            </a:prstTxWarp>
+            <a:spAutoFit/>
+          </a:bodyPr>
+          <a:lstStyle/>
+          <a:p>
+            <a:r>
+              <a:rPr lang="en-US" sz="2800">
+                <a:solidFill>
+                  <a:srgbClr val="FFFFFF"/>
+                </a:solidFill>
+                <a:latin typeface="Arial"/>
+                <a:cs typeface="Arial"/>
+              </a:rPr>
+              <a:t>Bad</a:t>
+            </a:r>
+            <a:r>
+              <a:rPr lang="en-US" sz="2800" baseline="0">
+                <a:solidFill>
+                  <a:srgbClr val="FFFFFF"/>
+                </a:solidFill>
+                <a:latin typeface="Arial"/>
+                <a:cs typeface="Arial"/>
+              </a:rPr>
+              <a:t> Data: </a:t>
+            </a:r>
+            <a:r>
+              <a:rPr lang="en-US" sz="2800" baseline="0" err="1">
+                <a:solidFill>
+                  <a:srgbClr val="FFFFFF"/>
+                </a:solidFill>
+                <a:latin typeface="Arial"/>
+                <a:cs typeface="Arial"/>
+              </a:rPr>
+              <a:t>Knn</a:t>
+            </a:r>
+            <a:r>
+              <a:rPr lang="en-US" sz="2800">
+                <a:solidFill>
+                  <a:srgbClr val="FFFFFF"/>
+                </a:solidFill>
+                <a:latin typeface="Arial"/>
+                <a:cs typeface="Arial"/>
+              </a:rPr>
+              <a:t> Classifier </a:t>
+            </a:r>
+            <a:r>
+              <a:rPr lang="en-US" sz="2800" baseline="0">
+                <a:solidFill>
+                  <a:srgbClr val="FFFFFF"/>
+                </a:solidFill>
+                <a:latin typeface="Arial"/>
+                <a:cs typeface="Arial"/>
+              </a:rPr>
+              <a:t>has better Predictions</a:t>
+            </a:r>
+            <a:r>
+              <a:rPr lang="en-US" sz="2800">
+                <a:latin typeface="Arial"/>
+                <a:ea typeface="Century Gothic"/>
+                <a:cs typeface="Arial"/>
+              </a:rPr>
+              <a:t>​</a:t>
+            </a:r>
+            <a:endParaRPr lang="en-US" sz="2800">
+              <a:latin typeface="Arial"/>
+              <a:cs typeface="Arial"/>
+            </a:endParaRPr>
+          </a:p>
+          <a:p>
+            <a:pPr algn="ctr"/>
+            <a:endParaRPr lang="en-US" sz="3200">
+              <a:latin typeface="Arial"/>
+              <a:cs typeface="Arial"/>
+            </a:endParaRPr>
+          </a:p>
+        </p:txBody>
+      </p:sp>
+      <p:pic>
+        <p:nvPicPr>
+          <p:cNvPr id="5" name="Picture 4" descr="A diagram of a number of blue squares&#10;&#10;AI-generated content may be incorrect.">
+            <a:extLst>
+              <a:ext uri="{FF2B5EF4-FFF2-40B4-BE49-F238E27FC236}">
+                <a16:creationId xmlns:a16="http://schemas.microsoft.com/office/drawing/2014/main" id="{07EF14BC-4FB8-8305-16C3-31D6FADB8263}"/>
+              </a:ext>
+            </a:extLst>
+          </p:cNvPr>
+          <p:cNvPicPr>
+            <a:picLocks noChangeAspect="1"/>
+          </p:cNvPicPr>
+          <p:nvPr/>
+        </p:nvPicPr>
+        <p:blipFill>
+          <a:blip r:embed="rId2"/>
+          <a:stretch>
+            <a:fillRect/>
+          </a:stretch>
+        </p:blipFill>
+        <p:spPr>
+          <a:xfrm>
+            <a:off x="376506" y="1883555"/>
+            <a:ext cx="5633150" cy="4304063"/>
+          </a:xfrm>
+          <a:prstGeom prst="rect">
+            <a:avLst/>
+          </a:prstGeom>
+        </p:spPr>
+      </p:pic>
+      <p:pic>
+        <p:nvPicPr>
+          <p:cNvPr id="6" name="Picture 5" descr="A green squares with white text&#10;&#10;AI-generated content may be incorrect.">
+            <a:extLst>
+              <a:ext uri="{FF2B5EF4-FFF2-40B4-BE49-F238E27FC236}">
+                <a16:creationId xmlns:a16="http://schemas.microsoft.com/office/drawing/2014/main" id="{859DD66A-C6D6-E52D-533C-1227A36A9BDE}"/>
+              </a:ext>
+            </a:extLst>
+          </p:cNvPr>
+          <p:cNvPicPr>
+            <a:picLocks noChangeAspect="1"/>
+          </p:cNvPicPr>
+          <p:nvPr/>
+        </p:nvPicPr>
+        <p:blipFill>
+          <a:blip r:embed="rId3"/>
+          <a:stretch>
+            <a:fillRect/>
+          </a:stretch>
+        </p:blipFill>
+        <p:spPr>
+          <a:xfrm>
+            <a:off x="6036588" y="1876425"/>
+            <a:ext cx="5827364" cy="4293354"/>
+          </a:xfrm>
+          <a:prstGeom prst="rect">
+            <a:avLst/>
+          </a:prstGeom>
+        </p:spPr>
+      </p:pic>
+      <p:sp>
+        <p:nvSpPr>
+          <p:cNvPr id="7" name="Rectangle 6">
+            <a:extLst>
+              <a:ext uri="{FF2B5EF4-FFF2-40B4-BE49-F238E27FC236}">
+                <a16:creationId xmlns:a16="http://schemas.microsoft.com/office/drawing/2014/main" id="{A1ED316A-2EFE-2DA7-207A-0485C115AD35}"/>
+              </a:ext>
+            </a:extLst>
+          </p:cNvPr>
+          <p:cNvSpPr/>
+          <p:nvPr/>
+        </p:nvSpPr>
+        <p:spPr>
+          <a:xfrm>
+            <a:off x="1712155" y="1908654"/>
+            <a:ext cx="3194832" cy="445340"/>
+          </a:xfrm>
+          <a:prstGeom prst="rect">
+            <a:avLst/>
+          </a:prstGeom>
+          <a:solidFill>
+            <a:schemeClr val="tx1"/>
+          </a:solidFill>
+          <a:ln>
+            <a:solidFill>
+              <a:schemeClr val="tx1"/>
+            </a:solidFill>
+          </a:ln>
+        </p:spPr>
+        <p:style>
+          <a:lnRef idx="2">
+            <a:schemeClr val="accent1">
+              <a:shade val="15000"/>
+            </a:schemeClr>
+          </a:lnRef>
+          <a:fillRef idx="1">
+            <a:schemeClr val="accent1"/>
+          </a:fillRef>
+          <a:effectRef idx="0">
+            <a:schemeClr val="accent1"/>
+          </a:effectRef>
+          <a:fontRef idx="minor">
+            <a:schemeClr val="lt1"/>
+          </a:fontRef>
+        </p:style>
+        <p:txBody>
+          <a:bodyPr rtlCol="0" anchor="ctr"/>
+          <a:lstStyle/>
+          <a:p>
+            <a:pPr algn="ctr"/>
+            <a:endParaRPr lang="en-US"/>
+          </a:p>
+        </p:txBody>
+      </p:sp>
+      <p:sp>
+        <p:nvSpPr>
+          <p:cNvPr id="8" name="Rectangle 7">
+            <a:extLst>
+              <a:ext uri="{FF2B5EF4-FFF2-40B4-BE49-F238E27FC236}">
+                <a16:creationId xmlns:a16="http://schemas.microsoft.com/office/drawing/2014/main" id="{EB324BC8-E8D8-F30D-81E4-7244DE53F9A6}"/>
+              </a:ext>
+            </a:extLst>
+          </p:cNvPr>
+          <p:cNvSpPr/>
+          <p:nvPr/>
+        </p:nvSpPr>
+        <p:spPr>
+          <a:xfrm>
+            <a:off x="7415883" y="1897536"/>
+            <a:ext cx="3156106" cy="348527"/>
+          </a:xfrm>
+          <a:prstGeom prst="rect">
+            <a:avLst/>
+          </a:prstGeom>
+          <a:solidFill>
+            <a:schemeClr val="tx1"/>
+          </a:solidFill>
+          <a:ln>
+            <a:solidFill>
+              <a:schemeClr val="tx1"/>
+            </a:solidFill>
+          </a:ln>
+        </p:spPr>
+        <p:style>
+          <a:lnRef idx="2">
+            <a:schemeClr val="accent1">
+              <a:shade val="15000"/>
+            </a:schemeClr>
+          </a:lnRef>
+          <a:fillRef idx="1">
+            <a:schemeClr val="accent1"/>
+          </a:fillRef>
+          <a:effectRef idx="0">
+            <a:schemeClr val="accent1"/>
+          </a:effectRef>
+          <a:fontRef idx="minor">
+            <a:schemeClr val="lt1"/>
+          </a:fontRef>
+        </p:style>
+        <p:txBody>
+          <a:bodyPr rtlCol="0" anchor="ctr"/>
+          <a:lstStyle/>
+          <a:p>
+            <a:pPr algn="ctr"/>
+            <a:endParaRPr lang="en-US"/>
+          </a:p>
+        </p:txBody>
+      </p:sp>
+      <p:sp>
+        <p:nvSpPr>
+          <p:cNvPr id="9" name="TextBox 8">
+            <a:extLst>
+              <a:ext uri="{FF2B5EF4-FFF2-40B4-BE49-F238E27FC236}">
+                <a16:creationId xmlns:a16="http://schemas.microsoft.com/office/drawing/2014/main" id="{4C1FB342-5850-1522-1324-BA0F04F61CB3}"/>
+              </a:ext>
+            </a:extLst>
+          </p:cNvPr>
+          <p:cNvSpPr txBox="1"/>
+          <p:nvPr/>
+        </p:nvSpPr>
+        <p:spPr>
+          <a:xfrm>
+            <a:off x="1587734" y="1905781"/>
+            <a:ext cx="3312159" cy="369332"/>
+          </a:xfrm>
+          <a:prstGeom prst="rect">
+            <a:avLst/>
+          </a:prstGeom>
+          <a:noFill/>
+        </p:spPr>
+        <p:txBody>
+          <a:bodyPr rot="0" spcFirstLastPara="0" vertOverflow="overflow" horzOverflow="overflow" vert="horz" wrap="square" lIns="91440" tIns="45720" rIns="91440" bIns="45720" numCol="1" spcCol="0" rtlCol="0" fromWordArt="0" anchor="t" anchorCtr="0" forceAA="0" compatLnSpc="1">
+            <a:prstTxWarp prst="textNoShape">
+              <a:avLst/>
+            </a:prstTxWarp>
+            <a:spAutoFit/>
+          </a:bodyPr>
+          <a:lstStyle/>
+          <a:p>
+            <a:r>
+              <a:rPr lang="en-US">
+                <a:solidFill>
+                  <a:schemeClr val="bg1"/>
+                </a:solidFill>
+              </a:rPr>
+              <a:t>Linear Classifier Is Worse</a:t>
+            </a:r>
+          </a:p>
+        </p:txBody>
+      </p:sp>
+      <p:sp>
+        <p:nvSpPr>
+          <p:cNvPr id="14" name="TextBox 13">
+            <a:extLst>
+              <a:ext uri="{FF2B5EF4-FFF2-40B4-BE49-F238E27FC236}">
+                <a16:creationId xmlns:a16="http://schemas.microsoft.com/office/drawing/2014/main" id="{ACC51D21-2D34-832F-582E-551578457215}"/>
+              </a:ext>
+            </a:extLst>
+          </p:cNvPr>
+          <p:cNvSpPr txBox="1"/>
+          <p:nvPr/>
+        </p:nvSpPr>
+        <p:spPr>
+          <a:xfrm>
+            <a:off x="7267363" y="1913257"/>
+            <a:ext cx="3891280" cy="369332"/>
+          </a:xfrm>
+          <a:prstGeom prst="rect">
+            <a:avLst/>
+          </a:prstGeom>
+          <a:noFill/>
+        </p:spPr>
+        <p:txBody>
+          <a:bodyPr rot="0" spcFirstLastPara="0" vertOverflow="overflow" horzOverflow="overflow" vert="horz" wrap="square" lIns="91440" tIns="45720" rIns="91440" bIns="45720" numCol="1" spcCol="0" rtlCol="0" fromWordArt="0" anchor="t" anchorCtr="0" forceAA="0" compatLnSpc="1">
+            <a:prstTxWarp prst="textNoShape">
+              <a:avLst/>
+            </a:prstTxWarp>
+            <a:spAutoFit/>
+          </a:bodyPr>
+          <a:lstStyle/>
+          <a:p>
+            <a:r>
+              <a:rPr lang="en-US">
+                <a:solidFill>
+                  <a:schemeClr val="bg1"/>
+                </a:solidFill>
+              </a:rPr>
+              <a:t>KNN Regressor Is Unchanged</a:t>
+            </a:r>
+          </a:p>
+        </p:txBody>
+      </p:sp>
+    </p:spTree>
+    <p:extLst>
+      <p:ext uri="{BB962C8B-B14F-4D97-AF65-F5344CB8AC3E}">
+        <p14:creationId xmlns:p14="http://schemas.microsoft.com/office/powerpoint/2010/main" val="2486051660"/>
+      </p:ext>
+    </p:extLst>
+  </p:cSld>
+  <p:clrMapOvr>
+    <a:masterClrMapping/>
+  </p:clrMapOvr>
+</p:sld>
+</file>
+
+<file path=ppt/slides/slide8.xml><?xml version="1.0" encoding="utf-8"?>
+<p:sld xmlns:a="http://schemas.openxmlformats.org/drawingml/2006/main" xmlns:r="http://schemas.openxmlformats.org/officeDocument/2006/relationships" xmlns:p="http://schemas.openxmlformats.org/presentationml/2006/main">
+  <p:cSld>
+    <p:spTree>
+      <p:nvGrpSpPr>
+        <p:cNvPr id="1" name=""/>
+        <p:cNvGrpSpPr/>
+        <p:nvPr/>
+      </p:nvGrpSpPr>
+      <p:grpSpPr>
+        <a:xfrm>
+          <a:off x="0" y="0"/>
+          <a:ext cx="0" cy="0"/>
+          <a:chOff x="0" y="0"/>
+          <a:chExt cx="0" cy="0"/>
+        </a:xfrm>
+      </p:grpSpPr>
+      <p:sp>
+        <p:nvSpPr>
           <p:cNvPr id="2" name="TextBox 1">
             <a:extLst>
               <a:ext uri="{FF2B5EF4-FFF2-40B4-BE49-F238E27FC236}">
@@ -9097,8 +11609,8 @@
         </p:nvSpPr>
         <p:spPr>
           <a:xfrm>
-            <a:off x="3093057" y="930303"/>
-            <a:ext cx="5502303" cy="369332"/>
+            <a:off x="1455089" y="508883"/>
+            <a:ext cx="8889558" cy="923330"/>
           </a:xfrm>
           <a:prstGeom prst="rect">
             <a:avLst/>
@@ -9106,15 +11618,121 @@
           <a:noFill/>
         </p:spPr>
         <p:txBody>
-          <a:bodyPr wrap="square" rtlCol="0">
+          <a:bodyPr wrap="square" lIns="91440" tIns="45720" rIns="91440" bIns="45720" rtlCol="0" anchor="t">
             <a:spAutoFit/>
           </a:bodyPr>
           <a:lstStyle/>
           <a:p>
-            <a:r>
-              <a:rPr lang="en-US"/>
-              <a:t>Pronob</a:t>
-            </a:r>
+            <a:pPr algn="ctr"/>
+            <a:r>
+              <a:rPr lang="en-US" sz="5400">
+                <a:latin typeface="Arial"/>
+                <a:cs typeface="Arial"/>
+              </a:rPr>
+              <a:t>Dataset: Heart Disease</a:t>
+            </a:r>
+          </a:p>
+        </p:txBody>
+      </p:sp>
+      <p:sp>
+        <p:nvSpPr>
+          <p:cNvPr id="5" name="TextBox 4">
+            <a:extLst>
+              <a:ext uri="{FF2B5EF4-FFF2-40B4-BE49-F238E27FC236}">
+                <a16:creationId xmlns:a16="http://schemas.microsoft.com/office/drawing/2014/main" id="{856EF08C-A5CF-5E5E-936D-B47B450A6718}"/>
+              </a:ext>
+            </a:extLst>
+          </p:cNvPr>
+          <p:cNvSpPr txBox="1"/>
+          <p:nvPr/>
+        </p:nvSpPr>
+        <p:spPr>
+          <a:xfrm>
+            <a:off x="413468" y="1558456"/>
+            <a:ext cx="11020508" cy="4093428"/>
+          </a:xfrm>
+          <a:prstGeom prst="rect">
+            <a:avLst/>
+          </a:prstGeom>
+          <a:noFill/>
+        </p:spPr>
+        <p:txBody>
+          <a:bodyPr wrap="square" lIns="91440" tIns="45720" rIns="91440" bIns="45720" rtlCol="0" anchor="t">
+            <a:spAutoFit/>
+          </a:bodyPr>
+          <a:lstStyle/>
+          <a:p>
+            <a:pPr marL="285750" indent="-285750">
+              <a:buFont typeface="Arial" panose="020B0604020202020204" pitchFamily="34" charset="0"/>
+              <a:buChar char="•"/>
+            </a:pPr>
+            <a:r>
+              <a:rPr lang="en-US" sz="2800">
+                <a:latin typeface="Arial"/>
+                <a:cs typeface="Arial"/>
+              </a:rPr>
+              <a:t>The dataset had multiple variables that are associated with heart disease.</a:t>
+            </a:r>
+          </a:p>
+          <a:p>
+            <a:pPr marL="285750" indent="-285750">
+              <a:buFont typeface="Arial" panose="020B0604020202020204" pitchFamily="34" charset="0"/>
+              <a:buChar char="•"/>
+            </a:pPr>
+            <a:r>
+              <a:rPr lang="en-US" sz="2800">
+                <a:latin typeface="Arial"/>
+                <a:cs typeface="Arial"/>
+              </a:rPr>
+              <a:t>Tried to predict whether someone is going to have heart disease or not.  </a:t>
+            </a:r>
+          </a:p>
+          <a:p>
+            <a:pPr marL="285750" indent="-285750">
+              <a:buFont typeface="Arial" panose="020B0604020202020204" pitchFamily="34" charset="0"/>
+              <a:buChar char="•"/>
+            </a:pPr>
+            <a:r>
+              <a:rPr lang="en-US" sz="2800">
+                <a:latin typeface="Arial"/>
+                <a:cs typeface="Arial"/>
+              </a:rPr>
+              <a:t>Analyzed data with the Logistic Regression model, along with Machine Learning Models like random forest and </a:t>
+            </a:r>
+            <a:r>
+              <a:rPr lang="en-US" sz="2800" err="1">
+                <a:latin typeface="Arial"/>
+                <a:cs typeface="Arial"/>
+              </a:rPr>
+              <a:t>XGboost</a:t>
+            </a:r>
+            <a:r>
+              <a:rPr lang="en-US" sz="2800">
+                <a:latin typeface="Arial"/>
+                <a:cs typeface="Arial"/>
+              </a:rPr>
+              <a:t>.</a:t>
+            </a:r>
+          </a:p>
+          <a:p>
+            <a:pPr marL="285750" indent="-285750">
+              <a:buFont typeface="Arial" panose="020B0604020202020204" pitchFamily="34" charset="0"/>
+              <a:buChar char="•"/>
+            </a:pPr>
+            <a:r>
+              <a:rPr lang="en-US" sz="2800">
+                <a:latin typeface="Arial"/>
+                <a:cs typeface="Arial"/>
+              </a:rPr>
+              <a:t>Made an applet which will use AI and take data from the user to predict the percentage of them having any Heart Diseases. </a:t>
+            </a:r>
+          </a:p>
+          <a:p>
+            <a:pPr marL="285750" indent="-285750">
+              <a:buFont typeface="Arial" panose="020B0604020202020204" pitchFamily="34" charset="0"/>
+              <a:buChar char="•"/>
+            </a:pPr>
+            <a:endParaRPr lang="en-US" sz="3600"/>
           </a:p>
         </p:txBody>
       </p:sp>
@@ -9122,6 +11740,182 @@
     <p:extLst>
       <p:ext uri="{BB962C8B-B14F-4D97-AF65-F5344CB8AC3E}">
         <p14:creationId xmlns:p14="http://schemas.microsoft.com/office/powerpoint/2010/main" val="2557246359"/>
+      </p:ext>
+    </p:extLst>
+  </p:cSld>
+  <p:clrMapOvr>
+    <a:masterClrMapping/>
+  </p:clrMapOvr>
+</p:sld>
+</file>
+
+<file path=ppt/slides/slide9.xml><?xml version="1.0" encoding="utf-8"?>
+<p:sld xmlns:a="http://schemas.openxmlformats.org/drawingml/2006/main" xmlns:r="http://schemas.openxmlformats.org/officeDocument/2006/relationships" xmlns:p="http://schemas.openxmlformats.org/presentationml/2006/main">
+  <p:cSld>
+    <p:spTree>
+      <p:nvGrpSpPr>
+        <p:cNvPr id="1" name="">
+          <a:extLst>
+            <a:ext uri="{FF2B5EF4-FFF2-40B4-BE49-F238E27FC236}">
+              <a16:creationId xmlns:a16="http://schemas.microsoft.com/office/drawing/2014/main" id="{552DF34B-F74B-D54A-1322-D207AB553A7A}"/>
+            </a:ext>
+          </a:extLst>
+        </p:cNvPr>
+        <p:cNvGrpSpPr/>
+        <p:nvPr/>
+      </p:nvGrpSpPr>
+      <p:grpSpPr>
+        <a:xfrm>
+          <a:off x="0" y="0"/>
+          <a:ext cx="0" cy="0"/>
+          <a:chOff x="0" y="0"/>
+          <a:chExt cx="0" cy="0"/>
+        </a:xfrm>
+      </p:grpSpPr>
+      <p:sp>
+        <p:nvSpPr>
+          <p:cNvPr id="3" name="TextBox 2">
+            <a:extLst>
+              <a:ext uri="{FF2B5EF4-FFF2-40B4-BE49-F238E27FC236}">
+                <a16:creationId xmlns:a16="http://schemas.microsoft.com/office/drawing/2014/main" id="{9A507855-AED7-298A-9634-C2ED25EAF518}"/>
+              </a:ext>
+            </a:extLst>
+          </p:cNvPr>
+          <p:cNvSpPr txBox="1"/>
+          <p:nvPr/>
+        </p:nvSpPr>
+        <p:spPr>
+          <a:xfrm>
+            <a:off x="1950720" y="173753"/>
+            <a:ext cx="8290560" cy="523220"/>
+          </a:xfrm>
+          <a:prstGeom prst="rect">
+            <a:avLst/>
+          </a:prstGeom>
+          <a:noFill/>
+        </p:spPr>
+        <p:txBody>
+          <a:bodyPr rot="0" spcFirstLastPara="0" vertOverflow="overflow" horzOverflow="overflow" vert="horz" wrap="square" lIns="91440" tIns="45720" rIns="91440" bIns="45720" numCol="1" spcCol="0" rtlCol="0" fromWordArt="0" anchor="t" anchorCtr="0" forceAA="0" compatLnSpc="1">
+            <a:prstTxWarp prst="textNoShape">
+              <a:avLst/>
+            </a:prstTxWarp>
+            <a:spAutoFit/>
+          </a:bodyPr>
+          <a:lstStyle/>
+          <a:p>
+            <a:pPr algn="ctr"/>
+            <a:r>
+              <a:rPr lang="en-US" sz="2800">
+                <a:latin typeface="Arial"/>
+                <a:cs typeface="Arial"/>
+              </a:rPr>
+              <a:t>ROC curve comparison</a:t>
+            </a:r>
+          </a:p>
+        </p:txBody>
+      </p:sp>
+      <p:pic>
+        <p:nvPicPr>
+          <p:cNvPr id="4" name="Picture 3">
+            <a:extLst>
+              <a:ext uri="{FF2B5EF4-FFF2-40B4-BE49-F238E27FC236}">
+                <a16:creationId xmlns:a16="http://schemas.microsoft.com/office/drawing/2014/main" id="{B2D127C8-1047-DC51-7825-A222429E1846}"/>
+              </a:ext>
+            </a:extLst>
+          </p:cNvPr>
+          <p:cNvPicPr>
+            <a:picLocks noChangeAspect="1"/>
+          </p:cNvPicPr>
+          <p:nvPr/>
+        </p:nvPicPr>
+        <p:blipFill>
+          <a:blip r:embed="rId2"/>
+          <a:stretch>
+            <a:fillRect/>
+          </a:stretch>
+        </p:blipFill>
+        <p:spPr>
+          <a:xfrm>
+            <a:off x="69547" y="1008560"/>
+            <a:ext cx="6333739" cy="4995496"/>
+          </a:xfrm>
+          <a:prstGeom prst="rect">
+            <a:avLst/>
+          </a:prstGeom>
+        </p:spPr>
+      </p:pic>
+      <p:pic>
+        <p:nvPicPr>
+          <p:cNvPr id="6" name="Picture 5">
+            <a:extLst>
+              <a:ext uri="{FF2B5EF4-FFF2-40B4-BE49-F238E27FC236}">
+                <a16:creationId xmlns:a16="http://schemas.microsoft.com/office/drawing/2014/main" id="{D95D4B59-221A-8045-36E2-A33CA2B55E65}"/>
+              </a:ext>
+            </a:extLst>
+          </p:cNvPr>
+          <p:cNvPicPr>
+            <a:picLocks noChangeAspect="1"/>
+          </p:cNvPicPr>
+          <p:nvPr/>
+        </p:nvPicPr>
+        <p:blipFill>
+          <a:blip r:embed="rId3"/>
+          <a:stretch>
+            <a:fillRect/>
+          </a:stretch>
+        </p:blipFill>
+        <p:spPr>
+          <a:xfrm>
+            <a:off x="6520070" y="1008560"/>
+            <a:ext cx="5602383" cy="4995496"/>
+          </a:xfrm>
+          <a:prstGeom prst="rect">
+            <a:avLst/>
+          </a:prstGeom>
+        </p:spPr>
+      </p:pic>
+      <p:sp>
+        <p:nvSpPr>
+          <p:cNvPr id="7" name="TextBox 6">
+            <a:extLst>
+              <a:ext uri="{FF2B5EF4-FFF2-40B4-BE49-F238E27FC236}">
+                <a16:creationId xmlns:a16="http://schemas.microsoft.com/office/drawing/2014/main" id="{636CC0DC-95D8-6257-2896-8987AFCB7A0B}"/>
+              </a:ext>
+            </a:extLst>
+          </p:cNvPr>
+          <p:cNvSpPr txBox="1"/>
+          <p:nvPr/>
+        </p:nvSpPr>
+        <p:spPr>
+          <a:xfrm>
+            <a:off x="612250" y="6249725"/>
+            <a:ext cx="11092070" cy="369332"/>
+          </a:xfrm>
+          <a:prstGeom prst="rect">
+            <a:avLst/>
+          </a:prstGeom>
+          <a:noFill/>
+        </p:spPr>
+        <p:txBody>
+          <a:bodyPr wrap="square" lIns="91440" tIns="45720" rIns="91440" bIns="45720" rtlCol="0" anchor="t">
+            <a:spAutoFit/>
+          </a:bodyPr>
+          <a:lstStyle/>
+          <a:p>
+            <a:r>
+              <a:rPr lang="en-US">
+                <a:latin typeface="Arial"/>
+                <a:cs typeface="Arial"/>
+              </a:rPr>
+              <a:t>Accuracy for both machine learning models are better than the logistic regression models</a:t>
+            </a:r>
+          </a:p>
+        </p:txBody>
+      </p:sp>
+    </p:spTree>
+    <p:extLst>
+      <p:ext uri="{BB962C8B-B14F-4D97-AF65-F5344CB8AC3E}">
+        <p14:creationId xmlns:p14="http://schemas.microsoft.com/office/powerpoint/2010/main" val="4256159325"/>
       </p:ext>
     </p:extLst>
   </p:cSld>
